--- a/apresentacoes/html-css/Slides-HTML-e-CSS.pptx
+++ b/apresentacoes/html-css/Slides-HTML-e-CSS.pptx
@@ -7,22 +7,18 @@
   <p:sldIdLst>
     <p:sldId id="256" r:id="rId7"/>
     <p:sldId id="257" r:id="rId9"/>
-    <p:sldId id="258" r:id="rId10"/>
     <p:sldId id="259" r:id="rId11"/>
     <p:sldId id="260" r:id="rId12"/>
     <p:sldId id="261" r:id="rId13"/>
     <p:sldId id="262" r:id="rId14"/>
     <p:sldId id="263" r:id="rId15"/>
-    <p:sldId id="264" r:id="rId16"/>
     <p:sldId id="265" r:id="rId17"/>
     <p:sldId id="266" r:id="rId18"/>
     <p:sldId id="267" r:id="rId19"/>
     <p:sldId id="268" r:id="rId20"/>
     <p:sldId id="269" r:id="rId21"/>
     <p:sldId id="270" r:id="rId22"/>
-    <p:sldId id="271" r:id="rId23"/>
     <p:sldId id="272" r:id="rId24"/>
-    <p:sldId id="273" r:id="rId25"/>
   </p:sldIdLst>
   <p:sldSz cx="12191695" cy="6858000" type="screen4x3"/>
   <p:notesSz cx="6858000" cy="9144000"/>
@@ -472,1266 +468,6 @@
     </a:lvl9pPr>
   </p:notesStyle>
 </p:notesMaster>
-</file>
-
-<file path=ppt/notesSlides/notesSlide1.xml><?xml version="1.0" encoding="utf-8"?>
-<p:notes xmlns:a="http://schemas.openxmlformats.org/drawingml/2006/main" xmlns:p="http://schemas.openxmlformats.org/presentationml/2006/main" xmlns:r="http://schemas.openxmlformats.org/officeDocument/2006/relationships">
-  <p:cSld>
-    <p:spTree>
-      <p:nvGrpSpPr>
-        <p:cNvPr id="1" name=""/>
-        <p:cNvGrpSpPr/>
-        <p:nvPr/>
-      </p:nvGrpSpPr>
-      <p:grpSpPr>
-        <a:xfrm>
-          <a:off x="0" y="0"/>
-          <a:ext cx="0" cy="0"/>
-          <a:chOff x="0" y="0"/>
-          <a:chExt cx="0" cy="0"/>
-        </a:xfrm>
-      </p:grpSpPr>
-      <p:sp>
-        <p:nvSpPr>
-          <p:cNvPr id="2" name="Slide Image Placeholder 1"/>
-          <p:cNvSpPr>
-            <a:spLocks noGrp="1"/>
-          </p:cNvSpPr>
-          <p:nvPr>
-            <p:ph type="sldImg" idx="2"/>
-          </p:nvPr>
-        </p:nvSpPr>
-        <p:spPr/>
-      </p:sp>
-      <p:sp>
-        <p:nvSpPr>
-          <p:cNvPr id="3" name="Notes Placeholder 2"/>
-          <p:cNvSpPr>
-            <a:spLocks noGrp="1"/>
-          </p:cNvSpPr>
-          <p:nvPr>
-            <p:ph type="body" idx="3" sz="quarter"/>
-          </p:nvPr>
-        </p:nvSpPr>
-        <p:spPr/>
-        <p:txBody>
-          <a:bodyPr/>
-          <a:lstStyle/>
-          <a:p>
-            <a:r>
-              <a:t>Abertura (40 s). Apresente o grupo e diga: HTML organiza o conteúdo; CSS define a apresentação. Vamos construir uma página de cursos para conectar cada conceito a algo visível. Acrescente nomes e turma à capa se desejar.</a:t>
-            </a:r>
-          </a:p>
-        </p:txBody>
-      </p:sp>
-      <p:sp>
-        <p:nvSpPr>
-          <p:cNvPr id="4" name="Slide Number Placeholder 3"/>
-          <p:cNvSpPr>
-            <a:spLocks noGrp="1"/>
-          </p:cNvSpPr>
-          <p:nvPr>
-            <p:ph type="sldNum" idx="5" sz="quarter"/>
-          </p:nvPr>
-        </p:nvSpPr>
-        <p:spPr/>
-      </p:sp>
-    </p:spTree>
-  </p:cSld>
-  <p:clrMapOvr>
-    <a:masterClrMapping/>
-  </p:clrMapOvr>
-</p:notes>
-</file>
-
-<file path=ppt/notesSlides/notesSlide10.xml><?xml version="1.0" encoding="utf-8"?>
-<p:notes xmlns:a="http://schemas.openxmlformats.org/drawingml/2006/main" xmlns:p="http://schemas.openxmlformats.org/presentationml/2006/main" xmlns:r="http://schemas.openxmlformats.org/officeDocument/2006/relationships">
-  <p:cSld>
-    <p:spTree>
-      <p:nvGrpSpPr>
-        <p:cNvPr id="1" name=""/>
-        <p:cNvGrpSpPr/>
-        <p:nvPr/>
-      </p:nvGrpSpPr>
-      <p:grpSpPr>
-        <a:xfrm>
-          <a:off x="0" y="0"/>
-          <a:ext cx="0" cy="0"/>
-          <a:chOff x="0" y="0"/>
-          <a:chExt cx="0" cy="0"/>
-        </a:xfrm>
-      </p:grpSpPr>
-      <p:sp>
-        <p:nvSpPr>
-          <p:cNvPr id="2" name="Slide Image Placeholder 1"/>
-          <p:cNvSpPr>
-            <a:spLocks noGrp="1"/>
-          </p:cNvSpPr>
-          <p:nvPr>
-            <p:ph type="sldImg" idx="2"/>
-          </p:nvPr>
-        </p:nvSpPr>
-        <p:spPr/>
-      </p:sp>
-      <p:sp>
-        <p:nvSpPr>
-          <p:cNvPr id="3" name="Notes Placeholder 2"/>
-          <p:cNvSpPr>
-            <a:spLocks noGrp="1"/>
-          </p:cNvSpPr>
-          <p:nvPr>
-            <p:ph type="body" idx="3" sz="quarter"/>
-          </p:nvPr>
-        </p:nvSpPr>
-        <p:spPr/>
-        <p:txBody>
-          <a:bodyPr/>
-          <a:lstStyle/>
-          <a:p>
-            <a:r>
-              <a:t>Box model (1 min). Do centro para fora: conteúdo, padding, border e margin. Padding é espaço dentro da borda; margin é espaço fora dela. Com border-box, width já inclui padding e borda, mas nunca a margem. Exemplo: width de 300px com padding de 20px em cada lado e borda de 1px mantém largura total de 300px com border-box; com content-box teria 342px, sem contar margem.</a:t>
-            </a:r>
-          </a:p>
-        </p:txBody>
-      </p:sp>
-      <p:sp>
-        <p:nvSpPr>
-          <p:cNvPr id="4" name="Slide Number Placeholder 3"/>
-          <p:cNvSpPr>
-            <a:spLocks noGrp="1"/>
-          </p:cNvSpPr>
-          <p:nvPr>
-            <p:ph type="sldNum" idx="5" sz="quarter"/>
-          </p:nvPr>
-        </p:nvSpPr>
-        <p:spPr/>
-      </p:sp>
-    </p:spTree>
-  </p:cSld>
-  <p:clrMapOvr>
-    <a:masterClrMapping/>
-  </p:clrMapOvr>
-</p:notes>
-</file>
-
-<file path=ppt/notesSlides/notesSlide11.xml><?xml version="1.0" encoding="utf-8"?>
-<p:notes xmlns:a="http://schemas.openxmlformats.org/drawingml/2006/main" xmlns:p="http://schemas.openxmlformats.org/presentationml/2006/main" xmlns:r="http://schemas.openxmlformats.org/officeDocument/2006/relationships">
-  <p:cSld>
-    <p:spTree>
-      <p:nvGrpSpPr>
-        <p:cNvPr id="1" name=""/>
-        <p:cNvGrpSpPr/>
-        <p:nvPr/>
-      </p:nvGrpSpPr>
-      <p:grpSpPr>
-        <a:xfrm>
-          <a:off x="0" y="0"/>
-          <a:ext cx="0" cy="0"/>
-          <a:chOff x="0" y="0"/>
-          <a:chExt cx="0" cy="0"/>
-        </a:xfrm>
-      </p:grpSpPr>
-      <p:sp>
-        <p:nvSpPr>
-          <p:cNvPr id="2" name="Slide Image Placeholder 1"/>
-          <p:cNvSpPr>
-            <a:spLocks noGrp="1"/>
-          </p:cNvSpPr>
-          <p:nvPr>
-            <p:ph type="sldImg" idx="2"/>
-          </p:nvPr>
-        </p:nvSpPr>
-        <p:spPr/>
-      </p:sp>
-      <p:sp>
-        <p:nvSpPr>
-          <p:cNvPr id="3" name="Notes Placeholder 2"/>
-          <p:cNvSpPr>
-            <a:spLocks noGrp="1"/>
-          </p:cNvSpPr>
-          <p:nvPr>
-            <p:ph type="body" idx="3" sz="quarter"/>
-          </p:nvPr>
-        </p:nvSpPr>
-        <p:spPr/>
-        <p:txBody>
-          <a:bodyPr/>
-          <a:lstStyle/>
-          <a:p>
-            <a:r>
-              <a:t>Flexbox (1 min). O padrão é flex-direction: row, então o eixo principal é horizontal neste exemplo. Se mudar para column, os eixos mudam. O justify-content: space-between coloca espaço entre os itens; align-items: center centraliza no eixo transversal. gap pode definir espaçamento entre itens; flex-wrap: wrap permite quebra em novas linhas quando necessário. O exemplo demonstrativo utiliza essas duas propriedades adicionais.</a:t>
-            </a:r>
-          </a:p>
-        </p:txBody>
-      </p:sp>
-      <p:sp>
-        <p:nvSpPr>
-          <p:cNvPr id="4" name="Slide Number Placeholder 3"/>
-          <p:cNvSpPr>
-            <a:spLocks noGrp="1"/>
-          </p:cNvSpPr>
-          <p:nvPr>
-            <p:ph type="sldNum" idx="5" sz="quarter"/>
-          </p:nvPr>
-        </p:nvSpPr>
-        <p:spPr/>
-      </p:sp>
-    </p:spTree>
-  </p:cSld>
-  <p:clrMapOvr>
-    <a:masterClrMapping/>
-  </p:clrMapOvr>
-</p:notes>
-</file>
-
-<file path=ppt/notesSlides/notesSlide12.xml><?xml version="1.0" encoding="utf-8"?>
-<p:notes xmlns:a="http://schemas.openxmlformats.org/drawingml/2006/main" xmlns:p="http://schemas.openxmlformats.org/presentationml/2006/main" xmlns:r="http://schemas.openxmlformats.org/officeDocument/2006/relationships">
-  <p:cSld>
-    <p:spTree>
-      <p:nvGrpSpPr>
-        <p:cNvPr id="1" name=""/>
-        <p:cNvGrpSpPr/>
-        <p:nvPr/>
-      </p:nvGrpSpPr>
-      <p:grpSpPr>
-        <a:xfrm>
-          <a:off x="0" y="0"/>
-          <a:ext cx="0" cy="0"/>
-          <a:chOff x="0" y="0"/>
-          <a:chExt cx="0" cy="0"/>
-        </a:xfrm>
-      </p:grpSpPr>
-      <p:sp>
-        <p:nvSpPr>
-          <p:cNvPr id="2" name="Slide Image Placeholder 1"/>
-          <p:cNvSpPr>
-            <a:spLocks noGrp="1"/>
-          </p:cNvSpPr>
-          <p:nvPr>
-            <p:ph type="sldImg" idx="2"/>
-          </p:nvPr>
-        </p:nvSpPr>
-        <p:spPr/>
-      </p:sp>
-      <p:sp>
-        <p:nvSpPr>
-          <p:cNvPr id="3" name="Notes Placeholder 2"/>
-          <p:cNvSpPr>
-            <a:spLocks noGrp="1"/>
-          </p:cNvSpPr>
-          <p:nvPr>
-            <p:ph type="body" idx="3" sz="quarter"/>
-          </p:nvPr>
-        </p:nvSpPr>
-        <p:spPr/>
-        <p:txBody>
-          <a:bodyPr/>
-          <a:lstStyle/>
-          <a:p>
-            <a:r>
-              <a:t>Grid (1 min). grid-template-columns define as colunas; repeat evita repetir a mesma declaração; 1fr representa uma fração do espaço livre. gap define os intervalos entre as células. Flex e Grid podem coexistir: o projeto usa Flex na navegação e Grid nos cards. O HTML do exemplo envolve os três articles em uma div class=cursos. Para conteúdo potencialmente longo, o exemplo completo usa minmax(0, 1fr) para permitir que as trilhas encolham.</a:t>
-            </a:r>
-          </a:p>
-        </p:txBody>
-      </p:sp>
-      <p:sp>
-        <p:nvSpPr>
-          <p:cNvPr id="4" name="Slide Number Placeholder 3"/>
-          <p:cNvSpPr>
-            <a:spLocks noGrp="1"/>
-          </p:cNvSpPr>
-          <p:nvPr>
-            <p:ph type="sldNum" idx="5" sz="quarter"/>
-          </p:nvPr>
-        </p:nvSpPr>
-        <p:spPr/>
-      </p:sp>
-    </p:spTree>
-  </p:cSld>
-  <p:clrMapOvr>
-    <a:masterClrMapping/>
-  </p:clrMapOvr>
-</p:notes>
-</file>
-
-<file path=ppt/notesSlides/notesSlide13.xml><?xml version="1.0" encoding="utf-8"?>
-<p:notes xmlns:a="http://schemas.openxmlformats.org/drawingml/2006/main" xmlns:p="http://schemas.openxmlformats.org/presentationml/2006/main" xmlns:r="http://schemas.openxmlformats.org/officeDocument/2006/relationships">
-  <p:cSld>
-    <p:spTree>
-      <p:nvGrpSpPr>
-        <p:cNvPr id="1" name=""/>
-        <p:cNvGrpSpPr/>
-        <p:nvPr/>
-      </p:nvGrpSpPr>
-      <p:grpSpPr>
-        <a:xfrm>
-          <a:off x="0" y="0"/>
-          <a:ext cx="0" cy="0"/>
-          <a:chOff x="0" y="0"/>
-          <a:chExt cx="0" cy="0"/>
-        </a:xfrm>
-      </p:grpSpPr>
-      <p:sp>
-        <p:nvSpPr>
-          <p:cNvPr id="2" name="Slide Image Placeholder 1"/>
-          <p:cNvSpPr>
-            <a:spLocks noGrp="1"/>
-          </p:cNvSpPr>
-          <p:nvPr>
-            <p:ph type="sldImg" idx="2"/>
-          </p:nvPr>
-        </p:nvSpPr>
-        <p:spPr/>
-      </p:sp>
-      <p:sp>
-        <p:nvSpPr>
-          <p:cNvPr id="3" name="Notes Placeholder 2"/>
-          <p:cNvSpPr>
-            <a:spLocks noGrp="1"/>
-          </p:cNvSpPr>
-          <p:nvPr>
-            <p:ph type="body" idx="3" sz="quarter"/>
-          </p:nvPr>
-        </p:nvSpPr>
-        <p:spPr/>
-        <p:txBody>
-          <a:bodyPr/>
-          <a:lstStyle/>
-          <a:p>
-            <a:r>
-              <a:t>Responsividade (1 min). Quando a viewport tem até 700px, a regra muda os cards de três para uma coluna. O breakpoint deve responder ao conteúdo, não só ao nome de um aparelho. A meta viewport do slide 4 evita a viewport virtual típica de páginas antigas no celular. Use max-width, porcentagens, rem e clamp quando fizer sentido; para imagens, max-width:100% e height:auto são um ponto de partida. Media query não detecta o tipo do dispositivo: testa uma condição da viewport. O exemplo foi verificado em 1280px, 700px e 390px.</a:t>
-            </a:r>
-          </a:p>
-        </p:txBody>
-      </p:sp>
-      <p:sp>
-        <p:nvSpPr>
-          <p:cNvPr id="4" name="Slide Number Placeholder 3"/>
-          <p:cNvSpPr>
-            <a:spLocks noGrp="1"/>
-          </p:cNvSpPr>
-          <p:nvPr>
-            <p:ph type="sldNum" idx="5" sz="quarter"/>
-          </p:nvPr>
-        </p:nvSpPr>
-        <p:spPr/>
-      </p:sp>
-    </p:spTree>
-  </p:cSld>
-  <p:clrMapOvr>
-    <a:masterClrMapping/>
-  </p:clrMapOvr>
-</p:notes>
-</file>
-
-<file path=ppt/notesSlides/notesSlide14.xml><?xml version="1.0" encoding="utf-8"?>
-<p:notes xmlns:a="http://schemas.openxmlformats.org/drawingml/2006/main" xmlns:p="http://schemas.openxmlformats.org/presentationml/2006/main" xmlns:r="http://schemas.openxmlformats.org/officeDocument/2006/relationships">
-  <p:cSld>
-    <p:spTree>
-      <p:nvGrpSpPr>
-        <p:cNvPr id="1" name=""/>
-        <p:cNvGrpSpPr/>
-        <p:nvPr/>
-      </p:nvGrpSpPr>
-      <p:grpSpPr>
-        <a:xfrm>
-          <a:off x="0" y="0"/>
-          <a:ext cx="0" cy="0"/>
-          <a:chOff x="0" y="0"/>
-          <a:chExt cx="0" cy="0"/>
-        </a:xfrm>
-      </p:grpSpPr>
-      <p:sp>
-        <p:nvSpPr>
-          <p:cNvPr id="2" name="Slide Image Placeholder 1"/>
-          <p:cNvSpPr>
-            <a:spLocks noGrp="1"/>
-          </p:cNvSpPr>
-          <p:nvPr>
-            <p:ph type="sldImg" idx="2"/>
-          </p:nvPr>
-        </p:nvSpPr>
-        <p:spPr/>
-      </p:sp>
-      <p:sp>
-        <p:nvSpPr>
-          <p:cNvPr id="3" name="Notes Placeholder 2"/>
-          <p:cNvSpPr>
-            <a:spLocks noGrp="1"/>
-          </p:cNvSpPr>
-          <p:nvPr>
-            <p:ph type="body" idx="3" sz="quarter"/>
-          </p:nvPr>
-        </p:nvSpPr>
-        <p:spPr/>
-        <p:txBody>
-          <a:bodyPr/>
-          <a:lstStyle/>
-          <a:p>
-            <a:r>
-              <a:t>Acessibilidade (1 min). Mostre a navegação com Tab no exemplo funcionando. Clicar no label deve focar o campo correto. Não remova outline sem fornecer um substituto acessível. Para texto comum, a WCAG nível AA normalmente exige contraste de pelo menos 4,5:1; texto grande tem limiar de 3:1. Esses valores não substituem uma avaliação completa de acessibilidade. A cor sozinha não deve transmitir estado, e placeholder não deve ser o único rótulo.</a:t>
-            </a:r>
-          </a:p>
-        </p:txBody>
-      </p:sp>
-      <p:sp>
-        <p:nvSpPr>
-          <p:cNvPr id="4" name="Slide Number Placeholder 3"/>
-          <p:cNvSpPr>
-            <a:spLocks noGrp="1"/>
-          </p:cNvSpPr>
-          <p:nvPr>
-            <p:ph type="sldNum" idx="5" sz="quarter"/>
-          </p:nvPr>
-        </p:nvSpPr>
-        <p:spPr/>
-      </p:sp>
-    </p:spTree>
-  </p:cSld>
-  <p:clrMapOvr>
-    <a:masterClrMapping/>
-  </p:clrMapOvr>
-</p:notes>
-</file>
-
-<file path=ppt/notesSlides/notesSlide15.xml><?xml version="1.0" encoding="utf-8"?>
-<p:notes xmlns:a="http://schemas.openxmlformats.org/drawingml/2006/main" xmlns:p="http://schemas.openxmlformats.org/presentationml/2006/main" xmlns:r="http://schemas.openxmlformats.org/officeDocument/2006/relationships">
-  <p:cSld>
-    <p:spTree>
-      <p:nvGrpSpPr>
-        <p:cNvPr id="1" name=""/>
-        <p:cNvGrpSpPr/>
-        <p:nvPr/>
-      </p:nvGrpSpPr>
-      <p:grpSpPr>
-        <a:xfrm>
-          <a:off x="0" y="0"/>
-          <a:ext cx="0" cy="0"/>
-          <a:chOff x="0" y="0"/>
-          <a:chExt cx="0" cy="0"/>
-        </a:xfrm>
-      </p:grpSpPr>
-      <p:sp>
-        <p:nvSpPr>
-          <p:cNvPr id="2" name="Slide Image Placeholder 1"/>
-          <p:cNvSpPr>
-            <a:spLocks noGrp="1"/>
-          </p:cNvSpPr>
-          <p:nvPr>
-            <p:ph type="sldImg" idx="2"/>
-          </p:nvPr>
-        </p:nvSpPr>
-        <p:spPr/>
-      </p:sp>
-      <p:sp>
-        <p:nvSpPr>
-          <p:cNvPr id="3" name="Notes Placeholder 2"/>
-          <p:cNvSpPr>
-            <a:spLocks noGrp="1"/>
-          </p:cNvSpPr>
-          <p:nvPr>
-            <p:ph type="body" idx="3" sz="quarter"/>
-          </p:nvPr>
-        </p:nvSpPr>
-        <p:spPr/>
-        <p:txBody>
-          <a:bodyPr/>
-          <a:lstStyle/>
-          <a:p>
-            <a:r>
-              <a:t>Projeto (45 s). As duas imagens são capturas do exemplo real. Abra exemplo.html em um navegador. O arquivo está completo e não precisa de instalação, servidor, internet ou JavaScript. Explique que os slides anteriores usam trechos reduzidos para ensinar e que o arquivo contém os ajustes completos de layout, foco e espaçamento. Não há backend ou cadastro efetivo.</a:t>
-            </a:r>
-          </a:p>
-        </p:txBody>
-      </p:sp>
-      <p:sp>
-        <p:nvSpPr>
-          <p:cNvPr id="4" name="Slide Number Placeholder 3"/>
-          <p:cNvSpPr>
-            <a:spLocks noGrp="1"/>
-          </p:cNvSpPr>
-          <p:nvPr>
-            <p:ph type="sldNum" idx="5" sz="quarter"/>
-          </p:nvPr>
-        </p:nvSpPr>
-        <p:spPr/>
-      </p:sp>
-    </p:spTree>
-  </p:cSld>
-  <p:clrMapOvr>
-    <a:masterClrMapping/>
-  </p:clrMapOvr>
-</p:notes>
-</file>
-
-<file path=ppt/notesSlides/notesSlide16.xml><?xml version="1.0" encoding="utf-8"?>
-<p:notes xmlns:a="http://schemas.openxmlformats.org/drawingml/2006/main" xmlns:p="http://schemas.openxmlformats.org/presentationml/2006/main" xmlns:r="http://schemas.openxmlformats.org/officeDocument/2006/relationships">
-  <p:cSld>
-    <p:spTree>
-      <p:nvGrpSpPr>
-        <p:cNvPr id="1" name=""/>
-        <p:cNvGrpSpPr/>
-        <p:nvPr/>
-      </p:nvGrpSpPr>
-      <p:grpSpPr>
-        <a:xfrm>
-          <a:off x="0" y="0"/>
-          <a:ext cx="0" cy="0"/>
-          <a:chOff x="0" y="0"/>
-          <a:chExt cx="0" cy="0"/>
-        </a:xfrm>
-      </p:grpSpPr>
-      <p:sp>
-        <p:nvSpPr>
-          <p:cNvPr id="2" name="Slide Image Placeholder 1"/>
-          <p:cNvSpPr>
-            <a:spLocks noGrp="1"/>
-          </p:cNvSpPr>
-          <p:nvPr>
-            <p:ph type="sldImg" idx="2"/>
-          </p:nvPr>
-        </p:nvSpPr>
-        <p:spPr/>
-      </p:sp>
-      <p:sp>
-        <p:nvSpPr>
-          <p:cNvPr id="3" name="Notes Placeholder 2"/>
-          <p:cNvSpPr>
-            <a:spLocks noGrp="1"/>
-          </p:cNvSpPr>
-          <p:nvPr>
-            <p:ph type="body" idx="3" sz="quarter"/>
-          </p:nvPr>
-        </p:nvSpPr>
-        <p:spPr/>
-        <p:txBody>
-          <a:bodyPr/>
-          <a:lstStyle/>
-          <a:p>
-            <a:r>
-              <a:t>Demonstração (2 min). Abra exemplo.html. 1: no modo responsivo das ferramentas do navegador, compare 1280px e 390px; observe a quebra dos cards e a ausência de rolagem horizontal. 2: use Tab para navegar e mostre o foco. Clique em um label. 3: no formulário, clique em Testar formulário sem preencher; o navegador deve apontar um obrigatório. Preencha Ana Exemplo e um texto sem arroba; o campo de e-mail deve rejeitar. Finalize com ana@example.com. Os dados fictícios aparecem na URL via GET e a página recarrega; não existe servidor salvando dados. Validação de interface não substitui validação no backend.</a:t>
-            </a:r>
-          </a:p>
-        </p:txBody>
-      </p:sp>
-      <p:sp>
-        <p:nvSpPr>
-          <p:cNvPr id="4" name="Slide Number Placeholder 3"/>
-          <p:cNvSpPr>
-            <a:spLocks noGrp="1"/>
-          </p:cNvSpPr>
-          <p:nvPr>
-            <p:ph type="sldNum" idx="5" sz="quarter"/>
-          </p:nvPr>
-        </p:nvSpPr>
-        <p:spPr/>
-      </p:sp>
-    </p:spTree>
-  </p:cSld>
-  <p:clrMapOvr>
-    <a:masterClrMapping/>
-  </p:clrMapOvr>
-</p:notes>
-</file>
-
-<file path=ppt/notesSlides/notesSlide17.xml><?xml version="1.0" encoding="utf-8"?>
-<p:notes xmlns:a="http://schemas.openxmlformats.org/drawingml/2006/main" xmlns:p="http://schemas.openxmlformats.org/presentationml/2006/main" xmlns:r="http://schemas.openxmlformats.org/officeDocument/2006/relationships">
-  <p:cSld>
-    <p:spTree>
-      <p:nvGrpSpPr>
-        <p:cNvPr id="1" name=""/>
-        <p:cNvGrpSpPr/>
-        <p:nvPr/>
-      </p:nvGrpSpPr>
-      <p:grpSpPr>
-        <a:xfrm>
-          <a:off x="0" y="0"/>
-          <a:ext cx="0" cy="0"/>
-          <a:chOff x="0" y="0"/>
-          <a:chExt cx="0" cy="0"/>
-        </a:xfrm>
-      </p:grpSpPr>
-      <p:sp>
-        <p:nvSpPr>
-          <p:cNvPr id="2" name="Slide Image Placeholder 1"/>
-          <p:cNvSpPr>
-            <a:spLocks noGrp="1"/>
-          </p:cNvSpPr>
-          <p:nvPr>
-            <p:ph type="sldImg" idx="2"/>
-          </p:nvPr>
-        </p:nvSpPr>
-        <p:spPr/>
-      </p:sp>
-      <p:sp>
-        <p:nvSpPr>
-          <p:cNvPr id="3" name="Notes Placeholder 2"/>
-          <p:cNvSpPr>
-            <a:spLocks noGrp="1"/>
-          </p:cNvSpPr>
-          <p:nvPr>
-            <p:ph type="body" idx="3" sz="quarter"/>
-          </p:nvPr>
-        </p:nvSpPr>
-        <p:spPr/>
-        <p:txBody>
-          <a:bodyPr/>
-          <a:lstStyle/>
-          <a:p>
-            <a:r>
-              <a:t>Fechamento (1 min). Peça respostas ao desafio antes de encerrar. Resposta: class é reutilizável e um elemento pode ter várias classes; id identifica um elemento de forma única no documento. Margin fica fora da borda e padding fica dentro. Pergunta extra: qual regra faz os cards mudarem para uma coluna? Resposta: a media query que altera grid-template-columns para 1fr. Conhecimento central: HTML e CSS trabalham juntos, com estrutura e estilo separados conceitualmente.</a:t>
-            </a:r>
-          </a:p>
-        </p:txBody>
-      </p:sp>
-      <p:sp>
-        <p:nvSpPr>
-          <p:cNvPr id="4" name="Slide Number Placeholder 3"/>
-          <p:cNvSpPr>
-            <a:spLocks noGrp="1"/>
-          </p:cNvSpPr>
-          <p:nvPr>
-            <p:ph type="sldNum" idx="5" sz="quarter"/>
-          </p:nvPr>
-        </p:nvSpPr>
-        <p:spPr/>
-      </p:sp>
-    </p:spTree>
-  </p:cSld>
-  <p:clrMapOvr>
-    <a:masterClrMapping/>
-  </p:clrMapOvr>
-</p:notes>
-</file>
-
-<file path=ppt/notesSlides/notesSlide18.xml><?xml version="1.0" encoding="utf-8"?>
-<p:notes xmlns:a="http://schemas.openxmlformats.org/drawingml/2006/main" xmlns:p="http://schemas.openxmlformats.org/presentationml/2006/main" xmlns:r="http://schemas.openxmlformats.org/officeDocument/2006/relationships">
-  <p:cSld>
-    <p:spTree>
-      <p:nvGrpSpPr>
-        <p:cNvPr id="1" name=""/>
-        <p:cNvGrpSpPr/>
-        <p:nvPr/>
-      </p:nvGrpSpPr>
-      <p:grpSpPr>
-        <a:xfrm>
-          <a:off x="0" y="0"/>
-          <a:ext cx="0" cy="0"/>
-          <a:chOff x="0" y="0"/>
-          <a:chExt cx="0" cy="0"/>
-        </a:xfrm>
-      </p:grpSpPr>
-      <p:sp>
-        <p:nvSpPr>
-          <p:cNvPr id="2" name="Slide Image Placeholder 1"/>
-          <p:cNvSpPr>
-            <a:spLocks noGrp="1"/>
-          </p:cNvSpPr>
-          <p:nvPr>
-            <p:ph type="sldImg" idx="2"/>
-          </p:nvPr>
-        </p:nvSpPr>
-        <p:spPr/>
-      </p:sp>
-      <p:sp>
-        <p:nvSpPr>
-          <p:cNvPr id="3" name="Notes Placeholder 2"/>
-          <p:cNvSpPr>
-            <a:spLocks noGrp="1"/>
-          </p:cNvSpPr>
-          <p:nvPr>
-            <p:ph type="body" idx="3" sz="quarter"/>
-          </p:nvPr>
-        </p:nvSpPr>
-        <p:spPr/>
-        <p:txBody>
-          <a:bodyPr/>
-          <a:lstStyle/>
-          <a:p>
-            <a:r>
-              <a:t>Referências (20 s). Estes são links de referência para aprofundamento, não uma lista de sites usados pelo projeto. Consulte a documentação de cada propriedade quando houver dúvida. Convide a turma a modificar o HTML e CSS do exemplo e observar o resultado no navegador.</a:t>
-            </a:r>
-          </a:p>
-        </p:txBody>
-      </p:sp>
-      <p:sp>
-        <p:nvSpPr>
-          <p:cNvPr id="4" name="Slide Number Placeholder 3"/>
-          <p:cNvSpPr>
-            <a:spLocks noGrp="1"/>
-          </p:cNvSpPr>
-          <p:nvPr>
-            <p:ph type="sldNum" idx="5" sz="quarter"/>
-          </p:nvPr>
-        </p:nvSpPr>
-        <p:spPr/>
-      </p:sp>
-    </p:spTree>
-  </p:cSld>
-  <p:clrMapOvr>
-    <a:masterClrMapping/>
-  </p:clrMapOvr>
-</p:notes>
-</file>
-
-<file path=ppt/notesSlides/notesSlide2.xml><?xml version="1.0" encoding="utf-8"?>
-<p:notes xmlns:a="http://schemas.openxmlformats.org/drawingml/2006/main" xmlns:p="http://schemas.openxmlformats.org/presentationml/2006/main" xmlns:r="http://schemas.openxmlformats.org/officeDocument/2006/relationships">
-  <p:cSld>
-    <p:spTree>
-      <p:nvGrpSpPr>
-        <p:cNvPr id="1" name=""/>
-        <p:cNvGrpSpPr/>
-        <p:nvPr/>
-      </p:nvGrpSpPr>
-      <p:grpSpPr>
-        <a:xfrm>
-          <a:off x="0" y="0"/>
-          <a:ext cx="0" cy="0"/>
-          <a:chOff x="0" y="0"/>
-          <a:chExt cx="0" cy="0"/>
-        </a:xfrm>
-      </p:grpSpPr>
-      <p:sp>
-        <p:nvSpPr>
-          <p:cNvPr id="2" name="Slide Image Placeholder 1"/>
-          <p:cNvSpPr>
-            <a:spLocks noGrp="1"/>
-          </p:cNvSpPr>
-          <p:nvPr>
-            <p:ph type="sldImg" idx="2"/>
-          </p:nvPr>
-        </p:nvSpPr>
-        <p:spPr/>
-      </p:sp>
-      <p:sp>
-        <p:nvSpPr>
-          <p:cNvPr id="3" name="Notes Placeholder 2"/>
-          <p:cNvSpPr>
-            <a:spLocks noGrp="1"/>
-          </p:cNvSpPr>
-          <p:nvPr>
-            <p:ph type="body" idx="3" sz="quarter"/>
-          </p:nvPr>
-        </p:nvSpPr>
-        <p:spPr/>
-        <p:txBody>
-          <a:bodyPr/>
-          <a:lstStyle/>
-          <a:p>
-            <a:r>
-              <a:t>Visão geral (45 s). O navegador cria uma representação da estrutura HTML, aplica as regras CSS e calcula o layout antes de desenhar. HTML e CSS não substituem a lógica de negócio ou o banco de dados. JavaScript é uma terceira camada comum, mas não será necessário no exemplo.</a:t>
-            </a:r>
-          </a:p>
-        </p:txBody>
-      </p:sp>
-      <p:sp>
-        <p:nvSpPr>
-          <p:cNvPr id="4" name="Slide Number Placeholder 3"/>
-          <p:cNvSpPr>
-            <a:spLocks noGrp="1"/>
-          </p:cNvSpPr>
-          <p:nvPr>
-            <p:ph type="sldNum" idx="5" sz="quarter"/>
-          </p:nvPr>
-        </p:nvSpPr>
-        <p:spPr/>
-      </p:sp>
-    </p:spTree>
-  </p:cSld>
-  <p:clrMapOvr>
-    <a:masterClrMapping/>
-  </p:clrMapOvr>
-</p:notes>
-</file>
-
-<file path=ppt/notesSlides/notesSlide3.xml><?xml version="1.0" encoding="utf-8"?>
-<p:notes xmlns:a="http://schemas.openxmlformats.org/drawingml/2006/main" xmlns:p="http://schemas.openxmlformats.org/presentationml/2006/main" xmlns:r="http://schemas.openxmlformats.org/officeDocument/2006/relationships">
-  <p:cSld>
-    <p:spTree>
-      <p:nvGrpSpPr>
-        <p:cNvPr id="1" name=""/>
-        <p:cNvGrpSpPr/>
-        <p:nvPr/>
-      </p:nvGrpSpPr>
-      <p:grpSpPr>
-        <a:xfrm>
-          <a:off x="0" y="0"/>
-          <a:ext cx="0" cy="0"/>
-          <a:chOff x="0" y="0"/>
-          <a:chExt cx="0" cy="0"/>
-        </a:xfrm>
-      </p:grpSpPr>
-      <p:sp>
-        <p:nvSpPr>
-          <p:cNvPr id="2" name="Slide Image Placeholder 1"/>
-          <p:cNvSpPr>
-            <a:spLocks noGrp="1"/>
-          </p:cNvSpPr>
-          <p:nvPr>
-            <p:ph type="sldImg" idx="2"/>
-          </p:nvPr>
-        </p:nvSpPr>
-        <p:spPr/>
-      </p:sp>
-      <p:sp>
-        <p:nvSpPr>
-          <p:cNvPr id="3" name="Notes Placeholder 2"/>
-          <p:cNvSpPr>
-            <a:spLocks noGrp="1"/>
-          </p:cNvSpPr>
-          <p:nvPr>
-            <p:ph type="body" idx="3" sz="quarter"/>
-          </p:nvPr>
-        </p:nvSpPr>
-        <p:spPr/>
-        <p:txBody>
-          <a:bodyPr/>
-          <a:lstStyle/>
-          <a:p>
-            <a:r>
-              <a:t>Aplicação (45 s). Dê exemplos próximos: site da escola, sistema de matrícula e loja online. Mesmo com React, Angular ou outros frameworks, a interface continua baseada em elementos HTML e regras CSS. Semântica e responsividade afetam acesso, manutenção e usabilidade.</a:t>
-            </a:r>
-          </a:p>
-        </p:txBody>
-      </p:sp>
-      <p:sp>
-        <p:nvSpPr>
-          <p:cNvPr id="4" name="Slide Number Placeholder 3"/>
-          <p:cNvSpPr>
-            <a:spLocks noGrp="1"/>
-          </p:cNvSpPr>
-          <p:nvPr>
-            <p:ph type="sldNum" idx="5" sz="quarter"/>
-          </p:nvPr>
-        </p:nvSpPr>
-        <p:spPr/>
-      </p:sp>
-    </p:spTree>
-  </p:cSld>
-  <p:clrMapOvr>
-    <a:masterClrMapping/>
-  </p:clrMapOvr>
-</p:notes>
-</file>
-
-<file path=ppt/notesSlides/notesSlide4.xml><?xml version="1.0" encoding="utf-8"?>
-<p:notes xmlns:a="http://schemas.openxmlformats.org/drawingml/2006/main" xmlns:p="http://schemas.openxmlformats.org/presentationml/2006/main" xmlns:r="http://schemas.openxmlformats.org/officeDocument/2006/relationships">
-  <p:cSld>
-    <p:spTree>
-      <p:nvGrpSpPr>
-        <p:cNvPr id="1" name=""/>
-        <p:cNvGrpSpPr/>
-        <p:nvPr/>
-      </p:nvGrpSpPr>
-      <p:grpSpPr>
-        <a:xfrm>
-          <a:off x="0" y="0"/>
-          <a:ext cx="0" cy="0"/>
-          <a:chOff x="0" y="0"/>
-          <a:chExt cx="0" cy="0"/>
-        </a:xfrm>
-      </p:grpSpPr>
-      <p:sp>
-        <p:nvSpPr>
-          <p:cNvPr id="2" name="Slide Image Placeholder 1"/>
-          <p:cNvSpPr>
-            <a:spLocks noGrp="1"/>
-          </p:cNvSpPr>
-          <p:nvPr>
-            <p:ph type="sldImg" idx="2"/>
-          </p:nvPr>
-        </p:nvSpPr>
-        <p:spPr/>
-      </p:sp>
-      <p:sp>
-        <p:nvSpPr>
-          <p:cNvPr id="3" name="Notes Placeholder 2"/>
-          <p:cNvSpPr>
-            <a:spLocks noGrp="1"/>
-          </p:cNvSpPr>
-          <p:nvPr>
-            <p:ph type="body" idx="3" sz="quarter"/>
-          </p:nvPr>
-        </p:nvSpPr>
-        <p:spPr/>
-        <p:txBody>
-          <a:bodyPr/>
-          <a:lstStyle/>
-          <a:p>
-            <a:r>
-              <a:t>Estrutura (1 min). Explique abertura, conteúdo e fechamento de uma tag usando h1. Atributos são informações na tag de abertura: lang é um exemplo. meta é um elemento vazio, sem tag de fechamento. title aparece na aba; h1 aparece no documento. UTF-8 permite os caracteres usados em português. A viewport é importante para o layout em dispositivos móveis.</a:t>
-            </a:r>
-          </a:p>
-        </p:txBody>
-      </p:sp>
-      <p:sp>
-        <p:nvSpPr>
-          <p:cNvPr id="4" name="Slide Number Placeholder 3"/>
-          <p:cNvSpPr>
-            <a:spLocks noGrp="1"/>
-          </p:cNvSpPr>
-          <p:nvPr>
-            <p:ph type="sldNum" idx="5" sz="quarter"/>
-          </p:nvPr>
-        </p:nvSpPr>
-        <p:spPr/>
-      </p:sp>
-    </p:spTree>
-  </p:cSld>
-  <p:clrMapOvr>
-    <a:masterClrMapping/>
-  </p:clrMapOvr>
-</p:notes>
-</file>
-
-<file path=ppt/notesSlides/notesSlide5.xml><?xml version="1.0" encoding="utf-8"?>
-<p:notes xmlns:a="http://schemas.openxmlformats.org/drawingml/2006/main" xmlns:p="http://schemas.openxmlformats.org/presentationml/2006/main" xmlns:r="http://schemas.openxmlformats.org/officeDocument/2006/relationships">
-  <p:cSld>
-    <p:spTree>
-      <p:nvGrpSpPr>
-        <p:cNvPr id="1" name=""/>
-        <p:cNvGrpSpPr/>
-        <p:nvPr/>
-      </p:nvGrpSpPr>
-      <p:grpSpPr>
-        <a:xfrm>
-          <a:off x="0" y="0"/>
-          <a:ext cx="0" cy="0"/>
-          <a:chOff x="0" y="0"/>
-          <a:chExt cx="0" cy="0"/>
-        </a:xfrm>
-      </p:grpSpPr>
-      <p:sp>
-        <p:nvSpPr>
-          <p:cNvPr id="2" name="Slide Image Placeholder 1"/>
-          <p:cNvSpPr>
-            <a:spLocks noGrp="1"/>
-          </p:cNvSpPr>
-          <p:nvPr>
-            <p:ph type="sldImg" idx="2"/>
-          </p:nvPr>
-        </p:nvSpPr>
-        <p:spPr/>
-      </p:sp>
-      <p:sp>
-        <p:nvSpPr>
-          <p:cNvPr id="3" name="Notes Placeholder 2"/>
-          <p:cNvSpPr>
-            <a:spLocks noGrp="1"/>
-          </p:cNvSpPr>
-          <p:nvPr>
-            <p:ph type="body" idx="3" sz="quarter"/>
-          </p:nvPr>
-        </p:nvSpPr>
-        <p:spPr/>
-        <p:txBody>
-          <a:bodyPr/>
-          <a:lstStyle/>
-          <a:p>
-            <a:r>
-              <a:t>Tags (1 min). header representa conteúdo introdutório; nav identifica a navegação; main é o conteúdo principal; section agrupa um tema; article é um conteúdo independente; footer é um rodapé. Mostre que section normalmente recebe um título. Exemplo de link: &lt;a href="#inscricao"&gt;Inscrição&lt;/a&gt;. Exemplo de imagem informativa: &lt;img src="turma.jpg" alt="Turma apresentando projetos"&gt;. Imagens decorativas recebem alt vazio. div e span continuam úteis quando não existe semântica específica.</a:t>
-            </a:r>
-          </a:p>
-        </p:txBody>
-      </p:sp>
-      <p:sp>
-        <p:nvSpPr>
-          <p:cNvPr id="4" name="Slide Number Placeholder 3"/>
-          <p:cNvSpPr>
-            <a:spLocks noGrp="1"/>
-          </p:cNvSpPr>
-          <p:nvPr>
-            <p:ph type="sldNum" idx="5" sz="quarter"/>
-          </p:nvPr>
-        </p:nvSpPr>
-        <p:spPr/>
-      </p:sp>
-    </p:spTree>
-  </p:cSld>
-  <p:clrMapOvr>
-    <a:masterClrMapping/>
-  </p:clrMapOvr>
-</p:notes>
-</file>
-
-<file path=ppt/notesSlides/notesSlide6.xml><?xml version="1.0" encoding="utf-8"?>
-<p:notes xmlns:a="http://schemas.openxmlformats.org/drawingml/2006/main" xmlns:p="http://schemas.openxmlformats.org/presentationml/2006/main" xmlns:r="http://schemas.openxmlformats.org/officeDocument/2006/relationships">
-  <p:cSld>
-    <p:spTree>
-      <p:nvGrpSpPr>
-        <p:cNvPr id="1" name=""/>
-        <p:cNvGrpSpPr/>
-        <p:nvPr/>
-      </p:nvGrpSpPr>
-      <p:grpSpPr>
-        <a:xfrm>
-          <a:off x="0" y="0"/>
-          <a:ext cx="0" cy="0"/>
-          <a:chOff x="0" y="0"/>
-          <a:chExt cx="0" cy="0"/>
-        </a:xfrm>
-      </p:grpSpPr>
-      <p:sp>
-        <p:nvSpPr>
-          <p:cNvPr id="2" name="Slide Image Placeholder 1"/>
-          <p:cNvSpPr>
-            <a:spLocks noGrp="1"/>
-          </p:cNvSpPr>
-          <p:nvPr>
-            <p:ph type="sldImg" idx="2"/>
-          </p:nvPr>
-        </p:nvSpPr>
-        <p:spPr/>
-      </p:sp>
-      <p:sp>
-        <p:nvSpPr>
-          <p:cNvPr id="3" name="Notes Placeholder 2"/>
-          <p:cNvSpPr>
-            <a:spLocks noGrp="1"/>
-          </p:cNvSpPr>
-          <p:nvPr>
-            <p:ph type="body" idx="3" sz="quarter"/>
-          </p:nvPr>
-        </p:nvSpPr>
-        <p:spPr/>
-        <p:txBody>
-          <a:bodyPr/>
-          <a:lstStyle/>
-          <a:p>
-            <a:r>
-              <a:t>Formulários (1 min 15 s). Explique que id conecta o campo ao label e deve ser único; name é a chave no envio. method=post envia dados no corpo da requisição, mas não cifra os dados: HTTPS é que protege o transporte. /cadastro é uma rota ilustrativa que exige backend; ela não existe no arquivo demonstrativo. required faz a validação no navegador, mas pode ser contornada, por isso o servidor precisa validar novamente. textarea coleta texto longo; checkbox e radio são outros tipos úteis. Placeholder não substitui label.</a:t>
-            </a:r>
-          </a:p>
-        </p:txBody>
-      </p:sp>
-      <p:sp>
-        <p:nvSpPr>
-          <p:cNvPr id="4" name="Slide Number Placeholder 3"/>
-          <p:cNvSpPr>
-            <a:spLocks noGrp="1"/>
-          </p:cNvSpPr>
-          <p:nvPr>
-            <p:ph type="sldNum" idx="5" sz="quarter"/>
-          </p:nvPr>
-        </p:nvSpPr>
-        <p:spPr/>
-      </p:sp>
-    </p:spTree>
-  </p:cSld>
-  <p:clrMapOvr>
-    <a:masterClrMapping/>
-  </p:clrMapOvr>
-</p:notes>
-</file>
-
-<file path=ppt/notesSlides/notesSlide7.xml><?xml version="1.0" encoding="utf-8"?>
-<p:notes xmlns:a="http://schemas.openxmlformats.org/drawingml/2006/main" xmlns:p="http://schemas.openxmlformats.org/presentationml/2006/main" xmlns:r="http://schemas.openxmlformats.org/officeDocument/2006/relationships">
-  <p:cSld>
-    <p:spTree>
-      <p:nvGrpSpPr>
-        <p:cNvPr id="1" name=""/>
-        <p:cNvGrpSpPr/>
-        <p:nvPr/>
-      </p:nvGrpSpPr>
-      <p:grpSpPr>
-        <a:xfrm>
-          <a:off x="0" y="0"/>
-          <a:ext cx="0" cy="0"/>
-          <a:chOff x="0" y="0"/>
-          <a:chExt cx="0" cy="0"/>
-        </a:xfrm>
-      </p:grpSpPr>
-      <p:sp>
-        <p:nvSpPr>
-          <p:cNvPr id="2" name="Slide Image Placeholder 1"/>
-          <p:cNvSpPr>
-            <a:spLocks noGrp="1"/>
-          </p:cNvSpPr>
-          <p:nvPr>
-            <p:ph type="sldImg" idx="2"/>
-          </p:nvPr>
-        </p:nvSpPr>
-        <p:spPr/>
-      </p:sp>
-      <p:sp>
-        <p:nvSpPr>
-          <p:cNvPr id="3" name="Notes Placeholder 2"/>
-          <p:cNvSpPr>
-            <a:spLocks noGrp="1"/>
-          </p:cNvSpPr>
-          <p:nvPr>
-            <p:ph type="body" idx="3" sz="quarter"/>
-          </p:nvPr>
-        </p:nvSpPr>
-        <p:spPr/>
-        <p:txBody>
-          <a:bodyPr/>
-          <a:lstStyle/>
-          <a:p>
-            <a:r>
-              <a:t>CSS (1 min). .card é o seletor. O bloco entre chaves contém declarações no formato propriedade: valor. background define o fundo; color define a cor do texto; padding cria espaço interno; border-radius arredonda os cantos. CSS pode ser externo, interno em style ou inline. Para manutenção, normalmente preferimos um arquivo externo. O exemplo demonstrativo usa style no mesmo HTML para ser aberto sem outros arquivos.</a:t>
-            </a:r>
-          </a:p>
-        </p:txBody>
-      </p:sp>
-      <p:sp>
-        <p:nvSpPr>
-          <p:cNvPr id="4" name="Slide Number Placeholder 3"/>
-          <p:cNvSpPr>
-            <a:spLocks noGrp="1"/>
-          </p:cNvSpPr>
-          <p:nvPr>
-            <p:ph type="sldNum" idx="5" sz="quarter"/>
-          </p:nvPr>
-        </p:nvSpPr>
-        <p:spPr/>
-      </p:sp>
-    </p:spTree>
-  </p:cSld>
-  <p:clrMapOvr>
-    <a:masterClrMapping/>
-  </p:clrMapOvr>
-</p:notes>
-</file>
-
-<file path=ppt/notesSlides/notesSlide8.xml><?xml version="1.0" encoding="utf-8"?>
-<p:notes xmlns:a="http://schemas.openxmlformats.org/drawingml/2006/main" xmlns:p="http://schemas.openxmlformats.org/presentationml/2006/main" xmlns:r="http://schemas.openxmlformats.org/officeDocument/2006/relationships">
-  <p:cSld>
-    <p:spTree>
-      <p:nvGrpSpPr>
-        <p:cNvPr id="1" name=""/>
-        <p:cNvGrpSpPr/>
-        <p:nvPr/>
-      </p:nvGrpSpPr>
-      <p:grpSpPr>
-        <a:xfrm>
-          <a:off x="0" y="0"/>
-          <a:ext cx="0" cy="0"/>
-          <a:chOff x="0" y="0"/>
-          <a:chExt cx="0" cy="0"/>
-        </a:xfrm>
-      </p:grpSpPr>
-      <p:sp>
-        <p:nvSpPr>
-          <p:cNvPr id="2" name="Slide Image Placeholder 1"/>
-          <p:cNvSpPr>
-            <a:spLocks noGrp="1"/>
-          </p:cNvSpPr>
-          <p:nvPr>
-            <p:ph type="sldImg" idx="2"/>
-          </p:nvPr>
-        </p:nvSpPr>
-        <p:spPr/>
-      </p:sp>
-      <p:sp>
-        <p:nvSpPr>
-          <p:cNvPr id="3" name="Notes Placeholder 2"/>
-          <p:cNvSpPr>
-            <a:spLocks noGrp="1"/>
-          </p:cNvSpPr>
-          <p:nvPr>
-            <p:ph type="body" idx="3" sz="quarter"/>
-          </p:nvPr>
-        </p:nvSpPr>
-        <p:spPr/>
-        <p:txBody>
-          <a:bodyPr/>
-          <a:lstStyle/>
-          <a:p>
-            <a:r>
-              <a:t>Seletores (1 min). Um elemento pode ter várias classes separadas por espaços. Um mesmo nome de classe pode ser reutilizado em vários elementos. id é único e também serve de destino para links internos. Para regras reutilizáveis, classes são uma boa escolha. O seletor de atributo e a pseudoclasse mostrados são seletores válidos mesmo sem chaves completas nesta tabela. :focus-visible permite destacar o elemento focado quando isso é apropriado, como na navegação por teclado.</a:t>
-            </a:r>
-          </a:p>
-        </p:txBody>
-      </p:sp>
-      <p:sp>
-        <p:nvSpPr>
-          <p:cNvPr id="4" name="Slide Number Placeholder 3"/>
-          <p:cNvSpPr>
-            <a:spLocks noGrp="1"/>
-          </p:cNvSpPr>
-          <p:nvPr>
-            <p:ph type="sldNum" idx="5" sz="quarter"/>
-          </p:nvPr>
-        </p:nvSpPr>
-        <p:spPr/>
-      </p:sp>
-    </p:spTree>
-  </p:cSld>
-  <p:clrMapOvr>
-    <a:masterClrMapping/>
-  </p:clrMapOvr>
-</p:notes>
-</file>
-
-<file path=ppt/notesSlides/notesSlide9.xml><?xml version="1.0" encoding="utf-8"?>
-<p:notes xmlns:a="http://schemas.openxmlformats.org/drawingml/2006/main" xmlns:p="http://schemas.openxmlformats.org/presentationml/2006/main" xmlns:r="http://schemas.openxmlformats.org/officeDocument/2006/relationships">
-  <p:cSld>
-    <p:spTree>
-      <p:nvGrpSpPr>
-        <p:cNvPr id="1" name=""/>
-        <p:cNvGrpSpPr/>
-        <p:nvPr/>
-      </p:nvGrpSpPr>
-      <p:grpSpPr>
-        <a:xfrm>
-          <a:off x="0" y="0"/>
-          <a:ext cx="0" cy="0"/>
-          <a:chOff x="0" y="0"/>
-          <a:chExt cx="0" cy="0"/>
-        </a:xfrm>
-      </p:grpSpPr>
-      <p:sp>
-        <p:nvSpPr>
-          <p:cNvPr id="2" name="Slide Image Placeholder 1"/>
-          <p:cNvSpPr>
-            <a:spLocks noGrp="1"/>
-          </p:cNvSpPr>
-          <p:nvPr>
-            <p:ph type="sldImg" idx="2"/>
-          </p:nvPr>
-        </p:nvSpPr>
-        <p:spPr/>
-      </p:sp>
-      <p:sp>
-        <p:nvSpPr>
-          <p:cNvPr id="3" name="Notes Placeholder 2"/>
-          <p:cNvSpPr>
-            <a:spLocks noGrp="1"/>
-          </p:cNvSpPr>
-          <p:nvPr>
-            <p:ph type="body" idx="3" sz="quarter"/>
-          </p:nvPr>
-        </p:nvSpPr>
-        <p:spPr/>
-        <p:txBody>
-          <a:bodyPr/>
-          <a:lstStyle/>
-          <a:p>
-            <a:r>
-              <a:t>Cascata (1 min). Todas as regras do exemplo são de mesma origem, mesma importância e sem camadas. Nesse contexto, o ID tem especificidade maior que a classe; a classe tem mais que o tipo. A ordem no arquivo resolve um empate de especificidade. A cascata completa considera origem, importância e camadas antes da especificidade. Não diga que ID sempre vence qualquer CSS. Evite resolver conflitos adicionando IDs ou !important sem compreender a causa.</a:t>
-            </a:r>
-          </a:p>
-        </p:txBody>
-      </p:sp>
-      <p:sp>
-        <p:nvSpPr>
-          <p:cNvPr id="4" name="Slide Number Placeholder 3"/>
-          <p:cNvSpPr>
-            <a:spLocks noGrp="1"/>
-          </p:cNvSpPr>
-          <p:nvPr>
-            <p:ph type="sldNum" idx="5" sz="quarter"/>
-          </p:nvPr>
-        </p:nvSpPr>
-        <p:spPr/>
-      </p:sp>
-    </p:spTree>
-  </p:cSld>
-  <p:clrMapOvr>
-    <a:masterClrMapping/>
-  </p:clrMapOvr>
-</p:notes>
 </file>
 
 <file path=ppt/slideLayouts/slideLayout1.xml><?xml version="1.0" encoding="utf-8"?>
@@ -5989,6 +4725,84 @@
           </a:p>
         </p:txBody>
       </p:sp>
+      <p:sp>
+        <p:nvSpPr>
+          <p:cNvPr id="32" name="TextBox 31"/>
+          <p:cNvSpPr txBox="1"/>
+          <p:nvPr/>
+        </p:nvSpPr>
+        <p:spPr>
+          <a:xfrm>
+            <a:off x="640080" y="5605272"/>
+            <a:ext cx="6400800" cy="237744"/>
+          </a:xfrm>
+          <a:prstGeom prst="rect">
+            <a:avLst/>
+          </a:prstGeom>
+          <a:noFill/>
+        </p:spPr>
+        <p:txBody>
+          <a:bodyPr wrap="square" lIns="9144" rIns="9144" tIns="0" bIns="0">
+            <a:spAutoFit/>
+          </a:bodyPr>
+          <a:lstStyle/>
+          <a:p>
+            <a:pPr>
+              <a:spcAft>
+                <a:spcPts val="700"/>
+              </a:spcAft>
+              <a:defRPr sz="1000" b="1">
+                <a:solidFill>
+                  <a:srgbClr val="6CE5D2"/>
+                </a:solidFill>
+                <a:latin typeface="DejaVu Sans"/>
+              </a:defRPr>
+            </a:pPr>
+            <a:r>
+              <a:t>APRESENTADO POR</a:t>
+            </a:r>
+          </a:p>
+        </p:txBody>
+      </p:sp>
+      <p:sp>
+        <p:nvSpPr>
+          <p:cNvPr id="33" name="TextBox 32"/>
+          <p:cNvSpPr txBox="1"/>
+          <p:nvPr/>
+        </p:nvSpPr>
+        <p:spPr>
+          <a:xfrm>
+            <a:off x="640080" y="5925312"/>
+            <a:ext cx="6492240" cy="365760"/>
+          </a:xfrm>
+          <a:prstGeom prst="rect">
+            <a:avLst/>
+          </a:prstGeom>
+          <a:noFill/>
+        </p:spPr>
+        <p:txBody>
+          <a:bodyPr wrap="square" lIns="9144" rIns="9144" tIns="0" bIns="0">
+            <a:spAutoFit/>
+          </a:bodyPr>
+          <a:lstStyle/>
+          <a:p>
+            <a:pPr>
+              <a:spcAft>
+                <a:spcPts val="700"/>
+              </a:spcAft>
+              <a:defRPr sz="1800" b="1">
+                <a:solidFill>
+                  <a:srgbClr val="F4F7FF"/>
+                </a:solidFill>
+                <a:latin typeface="DejaVu Sans"/>
+              </a:defRPr>
+            </a:pPr>
+            <a:r>
+              <a:t>Isaque • Jean • João Vitor</a:t>
+            </a:r>
+          </a:p>
+        </p:txBody>
+      </p:sp>
     </p:spTree>
   </p:cSld>
   <p:clrMapOvr>
@@ -6092,7 +4906,7 @@
               </a:defRPr>
             </a:pPr>
             <a:r>
-              <a:t>09 / ESPAÇAMENTO E DIMENSÕES</a:t>
+              <a:t>07 / ESPAÇAMENTO E DIMENSÕES</a:t>
             </a:r>
           </a:p>
         </p:txBody>
@@ -6252,7 +5066,7 @@
               </a:defRPr>
             </a:pPr>
             <a:r>
-              <a:t>10</a:t>
+              <a:t>08</a:t>
             </a:r>
           </a:p>
         </p:txBody>
@@ -7241,7 +6055,7 @@
               </a:defRPr>
             </a:pPr>
             <a:r>
-              <a:t>10 / LAYOUT COM FLEXBOX</a:t>
+              <a:t>08 / LAYOUT COM FLEXBOX</a:t>
             </a:r>
           </a:p>
         </p:txBody>
@@ -7440,7 +6254,7 @@
               </a:defRPr>
             </a:pPr>
             <a:r>
-              <a:t>11</a:t>
+              <a:t>09</a:t>
             </a:r>
           </a:p>
         </p:txBody>
@@ -8499,7 +7313,7 @@
               </a:defRPr>
             </a:pPr>
             <a:r>
-              <a:t>11 / LAYOUT COM CSS GRID</a:t>
+              <a:t>09 / LAYOUT COM CSS GRID</a:t>
             </a:r>
           </a:p>
         </p:txBody>
@@ -8698,7 +7512,7 @@
               </a:defRPr>
             </a:pPr>
             <a:r>
-              <a:t>12</a:t>
+              <a:t>10</a:t>
             </a:r>
           </a:p>
         </p:txBody>
@@ -9906,7 +8720,7 @@
               </a:defRPr>
             </a:pPr>
             <a:r>
-              <a:t>12 / TELAS DIFERENTES</a:t>
+              <a:t>10 / TELAS DIFERENTES</a:t>
             </a:r>
           </a:p>
         </p:txBody>
@@ -10105,7 +8919,7 @@
               </a:defRPr>
             </a:pPr>
             <a:r>
-              <a:t>13</a:t>
+              <a:t>11</a:t>
             </a:r>
           </a:p>
         </p:txBody>
@@ -11348,7 +10162,7 @@
               </a:defRPr>
             </a:pPr>
             <a:r>
-              <a:t>13 / BOAS PRÁTICAS</a:t>
+              <a:t>11 / BOAS PRÁTICAS</a:t>
             </a:r>
           </a:p>
         </p:txBody>
@@ -11508,7 +10322,7 @@
               </a:defRPr>
             </a:pPr>
             <a:r>
-              <a:t>14</a:t>
+              <a:t>12</a:t>
             </a:r>
           </a:p>
         </p:txBody>
@@ -12272,7 +11086,7 @@
               </a:defRPr>
             </a:pPr>
             <a:r>
-              <a:t>14 / EXEMPLO FUNCIONANDO</a:t>
+              <a:t>12 / EXEMPLO FUNCIONANDO</a:t>
             </a:r>
           </a:p>
         </p:txBody>
@@ -12471,7 +11285,7 @@
               </a:defRPr>
             </a:pPr>
             <a:r>
-              <a:t>15</a:t>
+              <a:t>13</a:t>
             </a:r>
           </a:p>
         </p:txBody>
@@ -12558,7 +11372,7 @@
               </a:defRPr>
             </a:pPr>
             <a:r>
-              <a:t>O que observar</a:t>
+              <a:t>Recursos da página</a:t>
             </a:r>
           </a:p>
         </p:txBody>
@@ -12793,625 +11607,6 @@
             </a:pPr>
             <a:r>
               <a:t>Capturas reais do exemplo.html em 1280px e 390px de largura.</a:t>
-            </a:r>
-          </a:p>
-        </p:txBody>
-      </p:sp>
-    </p:spTree>
-  </p:cSld>
-  <p:clrMapOvr>
-    <a:masterClrMapping/>
-  </p:clrMapOvr>
-</p:sld>
-</file>
-
-<file path=ppt/slides/slide16.xml><?xml version="1.0" encoding="utf-8"?>
-<p:sld xmlns:a="http://schemas.openxmlformats.org/drawingml/2006/main" xmlns:p="http://schemas.openxmlformats.org/presentationml/2006/main" xmlns:r="http://schemas.openxmlformats.org/officeDocument/2006/relationships">
-  <p:cSld>
-    <p:bg>
-      <p:bgPr>
-        <a:solidFill>
-          <a:srgbClr val="0B1020"/>
-        </a:solidFill>
-        <a:effectLst/>
-      </p:bgPr>
-    </p:bg>
-    <p:spTree>
-      <p:nvGrpSpPr>
-        <p:cNvPr id="1" name=""/>
-        <p:cNvGrpSpPr/>
-        <p:nvPr/>
-      </p:nvGrpSpPr>
-      <p:grpSpPr/>
-      <p:sp>
-        <p:nvSpPr>
-          <p:cNvPr id="2" name="Rectangle 1"/>
-          <p:cNvSpPr/>
-          <p:nvPr/>
-        </p:nvSpPr>
-        <p:spPr>
-          <a:xfrm>
-            <a:off x="411480" y="384048"/>
-            <a:ext cx="54864" cy="201168"/>
-          </a:xfrm>
-          <a:prstGeom prst="rect">
-            <a:avLst/>
-          </a:prstGeom>
-          <a:solidFill>
-            <a:srgbClr val="6CE5D2"/>
-          </a:solidFill>
-          <a:ln>
-            <a:noFill/>
-          </a:ln>
-        </p:spPr>
-        <p:style>
-          <a:lnRef idx="1">
-            <a:schemeClr val="accent1"/>
-          </a:lnRef>
-          <a:fillRef idx="3">
-            <a:schemeClr val="accent1"/>
-          </a:fillRef>
-          <a:effectRef idx="2">
-            <a:schemeClr val="accent1"/>
-          </a:effectRef>
-          <a:fontRef idx="minor">
-            <a:schemeClr val="lt1"/>
-          </a:fontRef>
-        </p:style>
-        <p:txBody>
-          <a:bodyPr rtlCol="0" anchor="ctr"/>
-          <a:lstStyle/>
-          <a:p>
-            <a:pPr algn="ctr"/>
-          </a:p>
-        </p:txBody>
-      </p:sp>
-      <p:sp>
-        <p:nvSpPr>
-          <p:cNvPr id="3" name="TextBox 2"/>
-          <p:cNvSpPr txBox="1"/>
-          <p:nvPr/>
-        </p:nvSpPr>
-        <p:spPr>
-          <a:xfrm>
-            <a:off x="603504" y="329184"/>
-            <a:ext cx="9144000" cy="256032"/>
-          </a:xfrm>
-          <a:prstGeom prst="rect">
-            <a:avLst/>
-          </a:prstGeom>
-          <a:noFill/>
-        </p:spPr>
-        <p:txBody>
-          <a:bodyPr wrap="square" lIns="9144" rIns="9144" tIns="0" bIns="0">
-            <a:spAutoFit/>
-          </a:bodyPr>
-          <a:lstStyle/>
-          <a:p>
-            <a:pPr>
-              <a:spcAft>
-                <a:spcPts val="700"/>
-              </a:spcAft>
-              <a:defRPr sz="1000" b="1">
-                <a:solidFill>
-                  <a:srgbClr val="6CE5D2"/>
-                </a:solidFill>
-                <a:latin typeface="DejaVu Sans"/>
-              </a:defRPr>
-            </a:pPr>
-            <a:r>
-              <a:t>15 / ROTEIRO PRÁTICO</a:t>
-            </a:r>
-          </a:p>
-        </p:txBody>
-      </p:sp>
-      <p:sp>
-        <p:nvSpPr>
-          <p:cNvPr id="4" name="TextBox 3"/>
-          <p:cNvSpPr txBox="1"/>
-          <p:nvPr/>
-        </p:nvSpPr>
-        <p:spPr>
-          <a:xfrm>
-            <a:off x="594360" y="859536"/>
-            <a:ext cx="10972800" cy="914400"/>
-          </a:xfrm>
-          <a:prstGeom prst="rect">
-            <a:avLst/>
-          </a:prstGeom>
-          <a:noFill/>
-        </p:spPr>
-        <p:txBody>
-          <a:bodyPr wrap="square" lIns="9144" rIns="9144" tIns="0" bIns="0">
-            <a:spAutoFit/>
-          </a:bodyPr>
-          <a:lstStyle/>
-          <a:p>
-            <a:pPr>
-              <a:spcAft>
-                <a:spcPts val="700"/>
-              </a:spcAft>
-              <a:defRPr sz="3100" b="1">
-                <a:solidFill>
-                  <a:srgbClr val="F4F7FF"/>
-                </a:solidFill>
-                <a:latin typeface="DejaVu Sans"/>
-              </a:defRPr>
-            </a:pPr>
-            <a:r>
-              <a:t>Demonstração ao vivo: três verificações.</a:t>
-            </a:r>
-          </a:p>
-        </p:txBody>
-      </p:sp>
-      <p:sp>
-        <p:nvSpPr>
-          <p:cNvPr id="5" name="Rectangle 4"/>
-          <p:cNvSpPr/>
-          <p:nvPr/>
-        </p:nvSpPr>
-        <p:spPr>
-          <a:xfrm>
-            <a:off x="594360" y="6437376"/>
-            <a:ext cx="11000232" cy="10972"/>
-          </a:xfrm>
-          <a:prstGeom prst="rect">
-            <a:avLst/>
-          </a:prstGeom>
-          <a:solidFill>
-            <a:srgbClr val="2A3854"/>
-          </a:solidFill>
-          <a:ln>
-            <a:noFill/>
-          </a:ln>
-        </p:spPr>
-        <p:style>
-          <a:lnRef idx="1">
-            <a:schemeClr val="accent1"/>
-          </a:lnRef>
-          <a:fillRef idx="3">
-            <a:schemeClr val="accent1"/>
-          </a:fillRef>
-          <a:effectRef idx="2">
-            <a:schemeClr val="accent1"/>
-          </a:effectRef>
-          <a:fontRef idx="minor">
-            <a:schemeClr val="lt1"/>
-          </a:fontRef>
-        </p:style>
-        <p:txBody>
-          <a:bodyPr rtlCol="0" anchor="ctr"/>
-          <a:lstStyle/>
-          <a:p>
-            <a:pPr algn="ctr"/>
-          </a:p>
-        </p:txBody>
-      </p:sp>
-      <p:sp>
-        <p:nvSpPr>
-          <p:cNvPr id="6" name="TextBox 5"/>
-          <p:cNvSpPr txBox="1"/>
-          <p:nvPr/>
-        </p:nvSpPr>
-        <p:spPr>
-          <a:xfrm>
-            <a:off x="612648" y="6547104"/>
-            <a:ext cx="8229600" cy="182880"/>
-          </a:xfrm>
-          <a:prstGeom prst="rect">
-            <a:avLst/>
-          </a:prstGeom>
-          <a:noFill/>
-        </p:spPr>
-        <p:txBody>
-          <a:bodyPr wrap="square" lIns="9144" rIns="9144" tIns="0" bIns="0">
-            <a:spAutoFit/>
-          </a:bodyPr>
-          <a:lstStyle/>
-          <a:p>
-            <a:pPr>
-              <a:spcAft>
-                <a:spcPts val="700"/>
-              </a:spcAft>
-              <a:defRPr sz="800" b="0">
-                <a:solidFill>
-                  <a:srgbClr val="B8C4DD"/>
-                </a:solidFill>
-                <a:latin typeface="DejaVu Sans"/>
-              </a:defRPr>
-            </a:pPr>
-            <a:r>
-              <a:t>DESENVOLVIMENTO DE SISTEMAS     /     TEMA 03     /     HTML + CSS</a:t>
-            </a:r>
-          </a:p>
-        </p:txBody>
-      </p:sp>
-      <p:sp>
-        <p:nvSpPr>
-          <p:cNvPr id="7" name="TextBox 6"/>
-          <p:cNvSpPr txBox="1"/>
-          <p:nvPr/>
-        </p:nvSpPr>
-        <p:spPr>
-          <a:xfrm>
-            <a:off x="11000232" y="6501384"/>
-            <a:ext cx="548640" cy="228600"/>
-          </a:xfrm>
-          <a:prstGeom prst="rect">
-            <a:avLst/>
-          </a:prstGeom>
-          <a:noFill/>
-        </p:spPr>
-        <p:txBody>
-          <a:bodyPr wrap="square" lIns="9144" rIns="9144" tIns="0" bIns="0">
-            <a:spAutoFit/>
-          </a:bodyPr>
-          <a:lstStyle/>
-          <a:p>
-            <a:pPr>
-              <a:spcAft>
-                <a:spcPts val="700"/>
-              </a:spcAft>
-              <a:defRPr sz="1100" b="1">
-                <a:solidFill>
-                  <a:srgbClr val="6CE5D2"/>
-                </a:solidFill>
-                <a:latin typeface="DejaVu Sans"/>
-              </a:defRPr>
-            </a:pPr>
-            <a:r>
-              <a:t>16</a:t>
-            </a:r>
-          </a:p>
-        </p:txBody>
-      </p:sp>
-      <p:sp>
-        <p:nvSpPr>
-          <p:cNvPr id="8" name="TextBox 7"/>
-          <p:cNvSpPr txBox="1"/>
-          <p:nvPr/>
-        </p:nvSpPr>
-        <p:spPr>
-          <a:xfrm>
-            <a:off x="777240" y="2423160"/>
-            <a:ext cx="548640" cy="365760"/>
-          </a:xfrm>
-          <a:prstGeom prst="rect">
-            <a:avLst/>
-          </a:prstGeom>
-          <a:noFill/>
-        </p:spPr>
-        <p:txBody>
-          <a:bodyPr wrap="square" lIns="9144" rIns="9144" tIns="0" bIns="0">
-            <a:spAutoFit/>
-          </a:bodyPr>
-          <a:lstStyle/>
-          <a:p>
-            <a:pPr>
-              <a:spcAft>
-                <a:spcPts val="700"/>
-              </a:spcAft>
-              <a:defRPr sz="1500" b="1">
-                <a:solidFill>
-                  <a:srgbClr val="6CE5D2"/>
-                </a:solidFill>
-                <a:latin typeface="DejaVu Sans Mono"/>
-              </a:defRPr>
-            </a:pPr>
-            <a:r>
-              <a:t>01</a:t>
-            </a:r>
-          </a:p>
-        </p:txBody>
-      </p:sp>
-      <p:sp>
-        <p:nvSpPr>
-          <p:cNvPr id="9" name="TextBox 8"/>
-          <p:cNvSpPr txBox="1"/>
-          <p:nvPr/>
-        </p:nvSpPr>
-        <p:spPr>
-          <a:xfrm>
-            <a:off x="1362456" y="2423160"/>
-            <a:ext cx="9930384" cy="365760"/>
-          </a:xfrm>
-          <a:prstGeom prst="rect">
-            <a:avLst/>
-          </a:prstGeom>
-          <a:noFill/>
-        </p:spPr>
-        <p:txBody>
-          <a:bodyPr wrap="square" lIns="9144" rIns="9144" tIns="0" bIns="0">
-            <a:spAutoFit/>
-          </a:bodyPr>
-          <a:lstStyle/>
-          <a:p>
-            <a:pPr>
-              <a:spcAft>
-                <a:spcPts val="700"/>
-              </a:spcAft>
-              <a:defRPr sz="1900" b="1">
-                <a:solidFill>
-                  <a:srgbClr val="F4F7FF"/>
-                </a:solidFill>
-                <a:latin typeface="DejaVu Sans"/>
-              </a:defRPr>
-            </a:pPr>
-            <a:r>
-              <a:t>Redimensionar a janela</a:t>
-            </a:r>
-          </a:p>
-        </p:txBody>
-      </p:sp>
-      <p:sp>
-        <p:nvSpPr>
-          <p:cNvPr id="10" name="TextBox 9"/>
-          <p:cNvSpPr txBox="1"/>
-          <p:nvPr/>
-        </p:nvSpPr>
-        <p:spPr>
-          <a:xfrm>
-            <a:off x="1362456" y="2926080"/>
-            <a:ext cx="9930384" cy="1005840"/>
-          </a:xfrm>
-          <a:prstGeom prst="rect">
-            <a:avLst/>
-          </a:prstGeom>
-          <a:noFill/>
-        </p:spPr>
-        <p:txBody>
-          <a:bodyPr wrap="square" lIns="9144" rIns="9144" tIns="0" bIns="0">
-            <a:spAutoFit/>
-          </a:bodyPr>
-          <a:lstStyle/>
-          <a:p>
-            <a:pPr>
-              <a:spcAft>
-                <a:spcPts val="700"/>
-              </a:spcAft>
-              <a:defRPr sz="1500" b="0">
-                <a:solidFill>
-                  <a:srgbClr val="B8C4DD"/>
-                </a:solidFill>
-                <a:latin typeface="DejaVu Sans"/>
-              </a:defRPr>
-            </a:pPr>
-            <a:r>
-              <a:t>Acima de 700px: três cards. Até 700px: uma coluna.</a:t>
-            </a:r>
-          </a:p>
-        </p:txBody>
-      </p:sp>
-      <p:sp>
-        <p:nvSpPr>
-          <p:cNvPr id="11" name="TextBox 10"/>
-          <p:cNvSpPr txBox="1"/>
-          <p:nvPr/>
-        </p:nvSpPr>
-        <p:spPr>
-          <a:xfrm>
-            <a:off x="777240" y="3611880"/>
-            <a:ext cx="548640" cy="365760"/>
-          </a:xfrm>
-          <a:prstGeom prst="rect">
-            <a:avLst/>
-          </a:prstGeom>
-          <a:noFill/>
-        </p:spPr>
-        <p:txBody>
-          <a:bodyPr wrap="square" lIns="9144" rIns="9144" tIns="0" bIns="0">
-            <a:spAutoFit/>
-          </a:bodyPr>
-          <a:lstStyle/>
-          <a:p>
-            <a:pPr>
-              <a:spcAft>
-                <a:spcPts val="700"/>
-              </a:spcAft>
-              <a:defRPr sz="1500" b="1">
-                <a:solidFill>
-                  <a:srgbClr val="6CE5D2"/>
-                </a:solidFill>
-                <a:latin typeface="DejaVu Sans Mono"/>
-              </a:defRPr>
-            </a:pPr>
-            <a:r>
-              <a:t>02</a:t>
-            </a:r>
-          </a:p>
-        </p:txBody>
-      </p:sp>
-      <p:sp>
-        <p:nvSpPr>
-          <p:cNvPr id="12" name="TextBox 11"/>
-          <p:cNvSpPr txBox="1"/>
-          <p:nvPr/>
-        </p:nvSpPr>
-        <p:spPr>
-          <a:xfrm>
-            <a:off x="1362456" y="3611880"/>
-            <a:ext cx="9930384" cy="365760"/>
-          </a:xfrm>
-          <a:prstGeom prst="rect">
-            <a:avLst/>
-          </a:prstGeom>
-          <a:noFill/>
-        </p:spPr>
-        <p:txBody>
-          <a:bodyPr wrap="square" lIns="9144" rIns="9144" tIns="0" bIns="0">
-            <a:spAutoFit/>
-          </a:bodyPr>
-          <a:lstStyle/>
-          <a:p>
-            <a:pPr>
-              <a:spcAft>
-                <a:spcPts val="700"/>
-              </a:spcAft>
-              <a:defRPr sz="1900" b="1">
-                <a:solidFill>
-                  <a:srgbClr val="F4F7FF"/>
-                </a:solidFill>
-                <a:latin typeface="DejaVu Sans"/>
-              </a:defRPr>
-            </a:pPr>
-            <a:r>
-              <a:t>Navegar usando Tab</a:t>
-            </a:r>
-          </a:p>
-        </p:txBody>
-      </p:sp>
-      <p:sp>
-        <p:nvSpPr>
-          <p:cNvPr id="13" name="TextBox 12"/>
-          <p:cNvSpPr txBox="1"/>
-          <p:nvPr/>
-        </p:nvSpPr>
-        <p:spPr>
-          <a:xfrm>
-            <a:off x="1362456" y="4114800"/>
-            <a:ext cx="9930384" cy="1005840"/>
-          </a:xfrm>
-          <a:prstGeom prst="rect">
-            <a:avLst/>
-          </a:prstGeom>
-          <a:noFill/>
-        </p:spPr>
-        <p:txBody>
-          <a:bodyPr wrap="square" lIns="9144" rIns="9144" tIns="0" bIns="0">
-            <a:spAutoFit/>
-          </a:bodyPr>
-          <a:lstStyle/>
-          <a:p>
-            <a:pPr>
-              <a:spcAft>
-                <a:spcPts val="700"/>
-              </a:spcAft>
-              <a:defRPr sz="1500" b="0">
-                <a:solidFill>
-                  <a:srgbClr val="B8C4DD"/>
-                </a:solidFill>
-                <a:latin typeface="DejaVu Sans"/>
-              </a:defRPr>
-            </a:pPr>
-            <a:r>
-              <a:t>Observe os links, os campos e o contorno de foco.</a:t>
-            </a:r>
-          </a:p>
-        </p:txBody>
-      </p:sp>
-      <p:sp>
-        <p:nvSpPr>
-          <p:cNvPr id="14" name="TextBox 13"/>
-          <p:cNvSpPr txBox="1"/>
-          <p:nvPr/>
-        </p:nvSpPr>
-        <p:spPr>
-          <a:xfrm>
-            <a:off x="777240" y="4800600"/>
-            <a:ext cx="548640" cy="365760"/>
-          </a:xfrm>
-          <a:prstGeom prst="rect">
-            <a:avLst/>
-          </a:prstGeom>
-          <a:noFill/>
-        </p:spPr>
-        <p:txBody>
-          <a:bodyPr wrap="square" lIns="9144" rIns="9144" tIns="0" bIns="0">
-            <a:spAutoFit/>
-          </a:bodyPr>
-          <a:lstStyle/>
-          <a:p>
-            <a:pPr>
-              <a:spcAft>
-                <a:spcPts val="700"/>
-              </a:spcAft>
-              <a:defRPr sz="1500" b="1">
-                <a:solidFill>
-                  <a:srgbClr val="6CE5D2"/>
-                </a:solidFill>
-                <a:latin typeface="DejaVu Sans Mono"/>
-              </a:defRPr>
-            </a:pPr>
-            <a:r>
-              <a:t>03</a:t>
-            </a:r>
-          </a:p>
-        </p:txBody>
-      </p:sp>
-      <p:sp>
-        <p:nvSpPr>
-          <p:cNvPr id="15" name="TextBox 14"/>
-          <p:cNvSpPr txBox="1"/>
-          <p:nvPr/>
-        </p:nvSpPr>
-        <p:spPr>
-          <a:xfrm>
-            <a:off x="1362456" y="4800600"/>
-            <a:ext cx="9930384" cy="365760"/>
-          </a:xfrm>
-          <a:prstGeom prst="rect">
-            <a:avLst/>
-          </a:prstGeom>
-          <a:noFill/>
-        </p:spPr>
-        <p:txBody>
-          <a:bodyPr wrap="square" lIns="9144" rIns="9144" tIns="0" bIns="0">
-            <a:spAutoFit/>
-          </a:bodyPr>
-          <a:lstStyle/>
-          <a:p>
-            <a:pPr>
-              <a:spcAft>
-                <a:spcPts val="700"/>
-              </a:spcAft>
-              <a:defRPr sz="1900" b="1">
-                <a:solidFill>
-                  <a:srgbClr val="F4F7FF"/>
-                </a:solidFill>
-                <a:latin typeface="DejaVu Sans"/>
-              </a:defRPr>
-            </a:pPr>
-            <a:r>
-              <a:t>Testar o formulário</a:t>
-            </a:r>
-          </a:p>
-        </p:txBody>
-      </p:sp>
-      <p:sp>
-        <p:nvSpPr>
-          <p:cNvPr id="16" name="TextBox 15"/>
-          <p:cNvSpPr txBox="1"/>
-          <p:nvPr/>
-        </p:nvSpPr>
-        <p:spPr>
-          <a:xfrm>
-            <a:off x="1362456" y="5303520"/>
-            <a:ext cx="9930384" cy="1005840"/>
-          </a:xfrm>
-          <a:prstGeom prst="rect">
-            <a:avLst/>
-          </a:prstGeom>
-          <a:noFill/>
-        </p:spPr>
-        <p:txBody>
-          <a:bodyPr wrap="square" lIns="9144" rIns="9144" tIns="0" bIns="0">
-            <a:spAutoFit/>
-          </a:bodyPr>
-          <a:lstStyle/>
-          <a:p>
-            <a:pPr>
-              <a:spcAft>
-                <a:spcPts val="700"/>
-              </a:spcAft>
-              <a:defRPr sz="1500" b="0">
-                <a:solidFill>
-                  <a:srgbClr val="B8C4DD"/>
-                </a:solidFill>
-                <a:latin typeface="DejaVu Sans"/>
-              </a:defRPr>
-            </a:pPr>
-            <a:r>
-              <a:t>Envie vazio; teste um e-mail inválido; depois use dados fictícios válidos.</a:t>
             </a:r>
           </a:p>
         </p:txBody>
@@ -13519,7 +11714,7 @@
               </a:defRPr>
             </a:pPr>
             <a:r>
-              <a:t>16 / REVISÃO FINAL</a:t>
+              <a:t>13 / CONCLUSÃO</a:t>
             </a:r>
           </a:p>
         </p:txBody>
@@ -13558,7 +11753,7 @@
               </a:defRPr>
             </a:pPr>
             <a:r>
-              <a:t>O essencial para levar com você.</a:t>
+              <a:t>Estrutura, estilo e adaptação.</a:t>
             </a:r>
           </a:p>
         </p:txBody>
@@ -13679,7 +11874,7 @@
               </a:defRPr>
             </a:pPr>
             <a:r>
-              <a:t>17</a:t>
+              <a:t>14</a:t>
             </a:r>
           </a:p>
         </p:txBody>
@@ -13757,7 +11952,7 @@
               </a:defRPr>
             </a:pPr>
             <a:r>
-              <a:t>Estruture pelo significado.</a:t>
+              <a:t>HTML dá significado ao conteúdo.</a:t>
             </a:r>
           </a:p>
         </p:txBody>
@@ -13874,7 +12069,7 @@
               </a:defRPr>
             </a:pPr>
             <a:r>
-              <a:t>Estilize com regras claras.</a:t>
+              <a:t>CSS constrói a identidade visual.</a:t>
             </a:r>
           </a:p>
         </p:txBody>
@@ -13913,7 +12108,7 @@
               </a:defRPr>
             </a:pPr>
             <a:r>
-              <a:t>Seletores, classes, IDs, cascata e box model.</a:t>
+              <a:t>Seletores, classes, IDs, cores e espaçamentos.</a:t>
             </a:r>
           </a:p>
         </p:txBody>
@@ -13991,7 +12186,7 @@
               </a:defRPr>
             </a:pPr>
             <a:r>
-              <a:t>Planeje para várias telas.</a:t>
+              <a:t>O layout se adapta à tela.</a:t>
             </a:r>
           </a:p>
         </p:txBody>
@@ -14030,7 +12225,7 @@
               </a:defRPr>
             </a:pPr>
             <a:r>
-              <a:t>Flexbox, Grid, media queries e testes de uso.</a:t>
+              <a:t>Flexbox, Grid e media queries organizam a interface.</a:t>
             </a:r>
           </a:p>
         </p:txBody>
@@ -14116,803 +12311,7 @@
               </a:defRPr>
             </a:pPr>
             <a:r>
-              <a:t>DESAFIO À TURMA   Qual a diferença entre class e id? E entre margin e padding?</a:t>
-            </a:r>
-          </a:p>
-        </p:txBody>
-      </p:sp>
-    </p:spTree>
-  </p:cSld>
-  <p:clrMapOvr>
-    <a:masterClrMapping/>
-  </p:clrMapOvr>
-</p:sld>
-</file>
-
-<file path=ppt/slides/slide18.xml><?xml version="1.0" encoding="utf-8"?>
-<p:sld xmlns:a="http://schemas.openxmlformats.org/drawingml/2006/main" xmlns:p="http://schemas.openxmlformats.org/presentationml/2006/main" xmlns:r="http://schemas.openxmlformats.org/officeDocument/2006/relationships">
-  <p:cSld>
-    <p:bg>
-      <p:bgPr>
-        <a:solidFill>
-          <a:srgbClr val="0B1020"/>
-        </a:solidFill>
-        <a:effectLst/>
-      </p:bgPr>
-    </p:bg>
-    <p:spTree>
-      <p:nvGrpSpPr>
-        <p:cNvPr id="1" name=""/>
-        <p:cNvGrpSpPr/>
-        <p:nvPr/>
-      </p:nvGrpSpPr>
-      <p:grpSpPr/>
-      <p:sp>
-        <p:nvSpPr>
-          <p:cNvPr id="2" name="Rectangle 1"/>
-          <p:cNvSpPr/>
-          <p:nvPr/>
-        </p:nvSpPr>
-        <p:spPr>
-          <a:xfrm>
-            <a:off x="411480" y="384048"/>
-            <a:ext cx="54864" cy="201168"/>
-          </a:xfrm>
-          <a:prstGeom prst="rect">
-            <a:avLst/>
-          </a:prstGeom>
-          <a:solidFill>
-            <a:srgbClr val="6CE5D2"/>
-          </a:solidFill>
-          <a:ln>
-            <a:noFill/>
-          </a:ln>
-        </p:spPr>
-        <p:style>
-          <a:lnRef idx="1">
-            <a:schemeClr val="accent1"/>
-          </a:lnRef>
-          <a:fillRef idx="3">
-            <a:schemeClr val="accent1"/>
-          </a:fillRef>
-          <a:effectRef idx="2">
-            <a:schemeClr val="accent1"/>
-          </a:effectRef>
-          <a:fontRef idx="minor">
-            <a:schemeClr val="lt1"/>
-          </a:fontRef>
-        </p:style>
-        <p:txBody>
-          <a:bodyPr rtlCol="0" anchor="ctr"/>
-          <a:lstStyle/>
-          <a:p>
-            <a:pPr algn="ctr"/>
-          </a:p>
-        </p:txBody>
-      </p:sp>
-      <p:sp>
-        <p:nvSpPr>
-          <p:cNvPr id="3" name="TextBox 2"/>
-          <p:cNvSpPr txBox="1"/>
-          <p:nvPr/>
-        </p:nvSpPr>
-        <p:spPr>
-          <a:xfrm>
-            <a:off x="603504" y="329184"/>
-            <a:ext cx="9144000" cy="256032"/>
-          </a:xfrm>
-          <a:prstGeom prst="rect">
-            <a:avLst/>
-          </a:prstGeom>
-          <a:noFill/>
-        </p:spPr>
-        <p:txBody>
-          <a:bodyPr wrap="square" lIns="9144" rIns="9144" tIns="0" bIns="0">
-            <a:spAutoFit/>
-          </a:bodyPr>
-          <a:lstStyle/>
-          <a:p>
-            <a:pPr>
-              <a:spcAft>
-                <a:spcPts val="700"/>
-              </a:spcAft>
-              <a:defRPr sz="1000" b="1">
-                <a:solidFill>
-                  <a:srgbClr val="6CE5D2"/>
-                </a:solidFill>
-                <a:latin typeface="DejaVu Sans"/>
-              </a:defRPr>
-            </a:pPr>
-            <a:r>
-              <a:t>17 / REFERÊNCIAS</a:t>
-            </a:r>
-          </a:p>
-        </p:txBody>
-      </p:sp>
-      <p:sp>
-        <p:nvSpPr>
-          <p:cNvPr id="4" name="TextBox 3"/>
-          <p:cNvSpPr txBox="1"/>
-          <p:nvPr/>
-        </p:nvSpPr>
-        <p:spPr>
-          <a:xfrm>
-            <a:off x="594360" y="859536"/>
-            <a:ext cx="10972800" cy="914400"/>
-          </a:xfrm>
-          <a:prstGeom prst="rect">
-            <a:avLst/>
-          </a:prstGeom>
-          <a:noFill/>
-        </p:spPr>
-        <p:txBody>
-          <a:bodyPr wrap="square" lIns="9144" rIns="9144" tIns="0" bIns="0">
-            <a:spAutoFit/>
-          </a:bodyPr>
-          <a:lstStyle/>
-          <a:p>
-            <a:pPr>
-              <a:spcAft>
-                <a:spcPts val="700"/>
-              </a:spcAft>
-              <a:defRPr sz="3100" b="1">
-                <a:solidFill>
-                  <a:srgbClr val="F4F7FF"/>
-                </a:solidFill>
-                <a:latin typeface="DejaVu Sans"/>
-              </a:defRPr>
-            </a:pPr>
-            <a:r>
-              <a:t>Fontes para aprofundar e praticar.</a:t>
-            </a:r>
-          </a:p>
-        </p:txBody>
-      </p:sp>
-      <p:sp>
-        <p:nvSpPr>
-          <p:cNvPr id="5" name="TextBox 4"/>
-          <p:cNvSpPr txBox="1"/>
-          <p:nvPr/>
-        </p:nvSpPr>
-        <p:spPr>
-          <a:xfrm>
-            <a:off x="612648" y="1682496"/>
-            <a:ext cx="10972800" cy="502920"/>
-          </a:xfrm>
-          <a:prstGeom prst="rect">
-            <a:avLst/>
-          </a:prstGeom>
-          <a:noFill/>
-        </p:spPr>
-        <p:txBody>
-          <a:bodyPr wrap="square" lIns="9144" rIns="9144" tIns="0" bIns="0">
-            <a:spAutoFit/>
-          </a:bodyPr>
-          <a:lstStyle/>
-          <a:p>
-            <a:pPr>
-              <a:spcAft>
-                <a:spcPts val="700"/>
-              </a:spcAft>
-              <a:defRPr sz="1500" b="0">
-                <a:solidFill>
-                  <a:srgbClr val="B8C4DD"/>
-                </a:solidFill>
-                <a:latin typeface="DejaVu Sans"/>
-              </a:defRPr>
-            </a:pPr>
-            <a:r>
-              <a:t>Documentação técnica para conferir conceitos, exemplos e boas práticas.</a:t>
-            </a:r>
-          </a:p>
-        </p:txBody>
-      </p:sp>
-      <p:sp>
-        <p:nvSpPr>
-          <p:cNvPr id="6" name="Rectangle 5"/>
-          <p:cNvSpPr/>
-          <p:nvPr/>
-        </p:nvSpPr>
-        <p:spPr>
-          <a:xfrm>
-            <a:off x="594360" y="6437376"/>
-            <a:ext cx="11000232" cy="10972"/>
-          </a:xfrm>
-          <a:prstGeom prst="rect">
-            <a:avLst/>
-          </a:prstGeom>
-          <a:solidFill>
-            <a:srgbClr val="2A3854"/>
-          </a:solidFill>
-          <a:ln>
-            <a:noFill/>
-          </a:ln>
-        </p:spPr>
-        <p:style>
-          <a:lnRef idx="1">
-            <a:schemeClr val="accent1"/>
-          </a:lnRef>
-          <a:fillRef idx="3">
-            <a:schemeClr val="accent1"/>
-          </a:fillRef>
-          <a:effectRef idx="2">
-            <a:schemeClr val="accent1"/>
-          </a:effectRef>
-          <a:fontRef idx="minor">
-            <a:schemeClr val="lt1"/>
-          </a:fontRef>
-        </p:style>
-        <p:txBody>
-          <a:bodyPr rtlCol="0" anchor="ctr"/>
-          <a:lstStyle/>
-          <a:p>
-            <a:pPr algn="ctr"/>
-          </a:p>
-        </p:txBody>
-      </p:sp>
-      <p:sp>
-        <p:nvSpPr>
-          <p:cNvPr id="7" name="TextBox 6"/>
-          <p:cNvSpPr txBox="1"/>
-          <p:nvPr/>
-        </p:nvSpPr>
-        <p:spPr>
-          <a:xfrm>
-            <a:off x="612648" y="6547104"/>
-            <a:ext cx="8229600" cy="182880"/>
-          </a:xfrm>
-          <a:prstGeom prst="rect">
-            <a:avLst/>
-          </a:prstGeom>
-          <a:noFill/>
-        </p:spPr>
-        <p:txBody>
-          <a:bodyPr wrap="square" lIns="9144" rIns="9144" tIns="0" bIns="0">
-            <a:spAutoFit/>
-          </a:bodyPr>
-          <a:lstStyle/>
-          <a:p>
-            <a:pPr>
-              <a:spcAft>
-                <a:spcPts val="700"/>
-              </a:spcAft>
-              <a:defRPr sz="800" b="0">
-                <a:solidFill>
-                  <a:srgbClr val="B8C4DD"/>
-                </a:solidFill>
-                <a:latin typeface="DejaVu Sans"/>
-              </a:defRPr>
-            </a:pPr>
-            <a:r>
-              <a:t>DESENVOLVIMENTO DE SISTEMAS     /     TEMA 03     /     HTML + CSS</a:t>
-            </a:r>
-          </a:p>
-        </p:txBody>
-      </p:sp>
-      <p:sp>
-        <p:nvSpPr>
-          <p:cNvPr id="8" name="TextBox 7"/>
-          <p:cNvSpPr txBox="1"/>
-          <p:nvPr/>
-        </p:nvSpPr>
-        <p:spPr>
-          <a:xfrm>
-            <a:off x="11000232" y="6501384"/>
-            <a:ext cx="548640" cy="228600"/>
-          </a:xfrm>
-          <a:prstGeom prst="rect">
-            <a:avLst/>
-          </a:prstGeom>
-          <a:noFill/>
-        </p:spPr>
-        <p:txBody>
-          <a:bodyPr wrap="square" lIns="9144" rIns="9144" tIns="0" bIns="0">
-            <a:spAutoFit/>
-          </a:bodyPr>
-          <a:lstStyle/>
-          <a:p>
-            <a:pPr>
-              <a:spcAft>
-                <a:spcPts val="700"/>
-              </a:spcAft>
-              <a:defRPr sz="1100" b="1">
-                <a:solidFill>
-                  <a:srgbClr val="6CE5D2"/>
-                </a:solidFill>
-                <a:latin typeface="DejaVu Sans"/>
-              </a:defRPr>
-            </a:pPr>
-            <a:r>
-              <a:t>18</a:t>
-            </a:r>
-          </a:p>
-        </p:txBody>
-      </p:sp>
-      <p:sp>
-        <p:nvSpPr>
-          <p:cNvPr id="9" name="TextBox 8"/>
-          <p:cNvSpPr txBox="1"/>
-          <p:nvPr/>
-        </p:nvSpPr>
-        <p:spPr>
-          <a:xfrm>
-            <a:off x="777240" y="2450592"/>
-            <a:ext cx="3657600" cy="338328"/>
-          </a:xfrm>
-          <a:prstGeom prst="rect">
-            <a:avLst/>
-          </a:prstGeom>
-          <a:noFill/>
-        </p:spPr>
-        <p:txBody>
-          <a:bodyPr wrap="square" lIns="9144" rIns="9144" tIns="0" bIns="0">
-            <a:spAutoFit/>
-          </a:bodyPr>
-          <a:lstStyle/>
-          <a:p>
-            <a:pPr>
-              <a:spcAft>
-                <a:spcPts val="700"/>
-              </a:spcAft>
-              <a:defRPr sz="1700" b="1">
-                <a:solidFill>
-                  <a:srgbClr val="F4F7FF"/>
-                </a:solidFill>
-                <a:latin typeface="DejaVu Sans"/>
-              </a:defRPr>
-            </a:pPr>
-            <a:r>
-              <a:t>MDN • HTML</a:t>
-            </a:r>
-          </a:p>
-        </p:txBody>
-      </p:sp>
-      <p:sp>
-        <p:nvSpPr>
-          <p:cNvPr id="10" name="TextBox 9"/>
-          <p:cNvSpPr txBox="1"/>
-          <p:nvPr/>
-        </p:nvSpPr>
-        <p:spPr>
-          <a:xfrm>
-            <a:off x="4343400" y="2487168"/>
-            <a:ext cx="7086600" cy="365760"/>
-          </a:xfrm>
-          <a:prstGeom prst="rect">
-            <a:avLst/>
-          </a:prstGeom>
-          <a:noFill/>
-        </p:spPr>
-        <p:txBody>
-          <a:bodyPr wrap="square" lIns="9144" rIns="9144" tIns="0" bIns="0">
-            <a:spAutoFit/>
-          </a:bodyPr>
-          <a:lstStyle/>
-          <a:p>
-            <a:pPr>
-              <a:spcAft>
-                <a:spcPts val="700"/>
-              </a:spcAft>
-              <a:defRPr sz="1000" b="0">
-                <a:solidFill>
-                  <a:srgbClr val="6CE5D2"/>
-                </a:solidFill>
-                <a:latin typeface="DejaVu Sans Mono"/>
-              </a:defRPr>
-            </a:pPr>
-            <a:r>
-              <a:rPr>
-                <a:hlinkClick r:id="rId2"/>
-              </a:rPr>
-              <a:t>developer.mozilla.org/pt-BR/docs/Web/HTML</a:t>
-            </a:r>
-          </a:p>
-        </p:txBody>
-      </p:sp>
-      <p:sp>
-        <p:nvSpPr>
-          <p:cNvPr id="11" name="TextBox 10"/>
-          <p:cNvSpPr txBox="1"/>
-          <p:nvPr/>
-        </p:nvSpPr>
-        <p:spPr>
-          <a:xfrm>
-            <a:off x="777240" y="3108960"/>
-            <a:ext cx="3657600" cy="338328"/>
-          </a:xfrm>
-          <a:prstGeom prst="rect">
-            <a:avLst/>
-          </a:prstGeom>
-          <a:noFill/>
-        </p:spPr>
-        <p:txBody>
-          <a:bodyPr wrap="square" lIns="9144" rIns="9144" tIns="0" bIns="0">
-            <a:spAutoFit/>
-          </a:bodyPr>
-          <a:lstStyle/>
-          <a:p>
-            <a:pPr>
-              <a:spcAft>
-                <a:spcPts val="700"/>
-              </a:spcAft>
-              <a:defRPr sz="1700" b="1">
-                <a:solidFill>
-                  <a:srgbClr val="F4F7FF"/>
-                </a:solidFill>
-                <a:latin typeface="DejaVu Sans"/>
-              </a:defRPr>
-            </a:pPr>
-            <a:r>
-              <a:t>MDN • CSS</a:t>
-            </a:r>
-          </a:p>
-        </p:txBody>
-      </p:sp>
-      <p:sp>
-        <p:nvSpPr>
-          <p:cNvPr id="12" name="TextBox 11"/>
-          <p:cNvSpPr txBox="1"/>
-          <p:nvPr/>
-        </p:nvSpPr>
-        <p:spPr>
-          <a:xfrm>
-            <a:off x="4343400" y="3145536"/>
-            <a:ext cx="7086600" cy="365760"/>
-          </a:xfrm>
-          <a:prstGeom prst="rect">
-            <a:avLst/>
-          </a:prstGeom>
-          <a:noFill/>
-        </p:spPr>
-        <p:txBody>
-          <a:bodyPr wrap="square" lIns="9144" rIns="9144" tIns="0" bIns="0">
-            <a:spAutoFit/>
-          </a:bodyPr>
-          <a:lstStyle/>
-          <a:p>
-            <a:pPr>
-              <a:spcAft>
-                <a:spcPts val="700"/>
-              </a:spcAft>
-              <a:defRPr sz="1000" b="0">
-                <a:solidFill>
-                  <a:srgbClr val="6CE5D2"/>
-                </a:solidFill>
-                <a:latin typeface="DejaVu Sans Mono"/>
-              </a:defRPr>
-            </a:pPr>
-            <a:r>
-              <a:rPr>
-                <a:hlinkClick r:id="rId3"/>
-              </a:rPr>
-              <a:t>developer.mozilla.org/pt-BR/docs/Web/CSS</a:t>
-            </a:r>
-          </a:p>
-        </p:txBody>
-      </p:sp>
-      <p:sp>
-        <p:nvSpPr>
-          <p:cNvPr id="13" name="TextBox 12"/>
-          <p:cNvSpPr txBox="1"/>
-          <p:nvPr/>
-        </p:nvSpPr>
-        <p:spPr>
-          <a:xfrm>
-            <a:off x="777240" y="3767328"/>
-            <a:ext cx="3657600" cy="338328"/>
-          </a:xfrm>
-          <a:prstGeom prst="rect">
-            <a:avLst/>
-          </a:prstGeom>
-          <a:noFill/>
-        </p:spPr>
-        <p:txBody>
-          <a:bodyPr wrap="square" lIns="9144" rIns="9144" tIns="0" bIns="0">
-            <a:spAutoFit/>
-          </a:bodyPr>
-          <a:lstStyle/>
-          <a:p>
-            <a:pPr>
-              <a:spcAft>
-                <a:spcPts val="700"/>
-              </a:spcAft>
-              <a:defRPr sz="1700" b="1">
-                <a:solidFill>
-                  <a:srgbClr val="F4F7FF"/>
-                </a:solidFill>
-                <a:latin typeface="DejaVu Sans"/>
-              </a:defRPr>
-            </a:pPr>
-            <a:r>
-              <a:t>MDN • Formulários</a:t>
-            </a:r>
-          </a:p>
-        </p:txBody>
-      </p:sp>
-      <p:sp>
-        <p:nvSpPr>
-          <p:cNvPr id="14" name="TextBox 13"/>
-          <p:cNvSpPr txBox="1"/>
-          <p:nvPr/>
-        </p:nvSpPr>
-        <p:spPr>
-          <a:xfrm>
-            <a:off x="4343400" y="3803904"/>
-            <a:ext cx="7086600" cy="365760"/>
-          </a:xfrm>
-          <a:prstGeom prst="rect">
-            <a:avLst/>
-          </a:prstGeom>
-          <a:noFill/>
-        </p:spPr>
-        <p:txBody>
-          <a:bodyPr wrap="square" lIns="9144" rIns="9144" tIns="0" bIns="0">
-            <a:spAutoFit/>
-          </a:bodyPr>
-          <a:lstStyle/>
-          <a:p>
-            <a:pPr>
-              <a:spcAft>
-                <a:spcPts val="700"/>
-              </a:spcAft>
-              <a:defRPr sz="1000" b="0">
-                <a:solidFill>
-                  <a:srgbClr val="6CE5D2"/>
-                </a:solidFill>
-                <a:latin typeface="DejaVu Sans Mono"/>
-              </a:defRPr>
-            </a:pPr>
-            <a:r>
-              <a:rPr>
-                <a:hlinkClick r:id="rId4"/>
-              </a:rPr>
-              <a:t>developer.mozilla.org/en-US/docs/Learn_web_development/Extensions/Forms</a:t>
-            </a:r>
-          </a:p>
-        </p:txBody>
-      </p:sp>
-      <p:sp>
-        <p:nvSpPr>
-          <p:cNvPr id="15" name="TextBox 14"/>
-          <p:cNvSpPr txBox="1"/>
-          <p:nvPr/>
-        </p:nvSpPr>
-        <p:spPr>
-          <a:xfrm>
-            <a:off x="777240" y="4425696"/>
-            <a:ext cx="3657600" cy="338328"/>
-          </a:xfrm>
-          <a:prstGeom prst="rect">
-            <a:avLst/>
-          </a:prstGeom>
-          <a:noFill/>
-        </p:spPr>
-        <p:txBody>
-          <a:bodyPr wrap="square" lIns="9144" rIns="9144" tIns="0" bIns="0">
-            <a:spAutoFit/>
-          </a:bodyPr>
-          <a:lstStyle/>
-          <a:p>
-            <a:pPr>
-              <a:spcAft>
-                <a:spcPts val="700"/>
-              </a:spcAft>
-              <a:defRPr sz="1700" b="1">
-                <a:solidFill>
-                  <a:srgbClr val="F4F7FF"/>
-                </a:solidFill>
-                <a:latin typeface="DejaVu Sans"/>
-              </a:defRPr>
-            </a:pPr>
-            <a:r>
-              <a:t>MDN • Layout responsivo</a:t>
-            </a:r>
-          </a:p>
-        </p:txBody>
-      </p:sp>
-      <p:sp>
-        <p:nvSpPr>
-          <p:cNvPr id="16" name="TextBox 15"/>
-          <p:cNvSpPr txBox="1"/>
-          <p:nvPr/>
-        </p:nvSpPr>
-        <p:spPr>
-          <a:xfrm>
-            <a:off x="4343400" y="4462272"/>
-            <a:ext cx="7086600" cy="365760"/>
-          </a:xfrm>
-          <a:prstGeom prst="rect">
-            <a:avLst/>
-          </a:prstGeom>
-          <a:noFill/>
-        </p:spPr>
-        <p:txBody>
-          <a:bodyPr wrap="square" lIns="9144" rIns="9144" tIns="0" bIns="0">
-            <a:spAutoFit/>
-          </a:bodyPr>
-          <a:lstStyle/>
-          <a:p>
-            <a:pPr>
-              <a:spcAft>
-                <a:spcPts val="700"/>
-              </a:spcAft>
-              <a:defRPr sz="1000" b="0">
-                <a:solidFill>
-                  <a:srgbClr val="6CE5D2"/>
-                </a:solidFill>
-                <a:latin typeface="DejaVu Sans Mono"/>
-              </a:defRPr>
-            </a:pPr>
-            <a:r>
-              <a:rPr>
-                <a:hlinkClick r:id="rId5"/>
-              </a:rPr>
-              <a:t>developer.mozilla.org/en-US/docs/Learn_web_development/Core/CSS_layout/Responsive_Design</a:t>
-            </a:r>
-          </a:p>
-        </p:txBody>
-      </p:sp>
-      <p:sp>
-        <p:nvSpPr>
-          <p:cNvPr id="17" name="TextBox 16"/>
-          <p:cNvSpPr txBox="1"/>
-          <p:nvPr/>
-        </p:nvSpPr>
-        <p:spPr>
-          <a:xfrm>
-            <a:off x="777240" y="5084064"/>
-            <a:ext cx="3657600" cy="338328"/>
-          </a:xfrm>
-          <a:prstGeom prst="rect">
-            <a:avLst/>
-          </a:prstGeom>
-          <a:noFill/>
-        </p:spPr>
-        <p:txBody>
-          <a:bodyPr wrap="square" lIns="9144" rIns="9144" tIns="0" bIns="0">
-            <a:spAutoFit/>
-          </a:bodyPr>
-          <a:lstStyle/>
-          <a:p>
-            <a:pPr>
-              <a:spcAft>
-                <a:spcPts val="700"/>
-              </a:spcAft>
-              <a:defRPr sz="1700" b="1">
-                <a:solidFill>
-                  <a:srgbClr val="F4F7FF"/>
-                </a:solidFill>
-                <a:latin typeface="DejaVu Sans"/>
-              </a:defRPr>
-            </a:pPr>
-            <a:r>
-              <a:t>W3C WAI • Acessibilidade</a:t>
-            </a:r>
-          </a:p>
-        </p:txBody>
-      </p:sp>
-      <p:sp>
-        <p:nvSpPr>
-          <p:cNvPr id="18" name="TextBox 17"/>
-          <p:cNvSpPr txBox="1"/>
-          <p:nvPr/>
-        </p:nvSpPr>
-        <p:spPr>
-          <a:xfrm>
-            <a:off x="4343400" y="5120640"/>
-            <a:ext cx="7086600" cy="365760"/>
-          </a:xfrm>
-          <a:prstGeom prst="rect">
-            <a:avLst/>
-          </a:prstGeom>
-          <a:noFill/>
-        </p:spPr>
-        <p:txBody>
-          <a:bodyPr wrap="square" lIns="9144" rIns="9144" tIns="0" bIns="0">
-            <a:spAutoFit/>
-          </a:bodyPr>
-          <a:lstStyle/>
-          <a:p>
-            <a:pPr>
-              <a:spcAft>
-                <a:spcPts val="700"/>
-              </a:spcAft>
-              <a:defRPr sz="1000" b="0">
-                <a:solidFill>
-                  <a:srgbClr val="6CE5D2"/>
-                </a:solidFill>
-                <a:latin typeface="DejaVu Sans Mono"/>
-              </a:defRPr>
-            </a:pPr>
-            <a:r>
-              <a:rPr>
-                <a:hlinkClick r:id="rId6"/>
-              </a:rPr>
-              <a:t>w3.org/WAI/tutorials/</a:t>
-            </a:r>
-          </a:p>
-        </p:txBody>
-      </p:sp>
-      <p:sp>
-        <p:nvSpPr>
-          <p:cNvPr id="19" name="Rounded Rectangle 18"/>
-          <p:cNvSpPr/>
-          <p:nvPr/>
-        </p:nvSpPr>
-        <p:spPr>
-          <a:xfrm>
-            <a:off x="777240" y="5943600"/>
-            <a:ext cx="10698480" cy="274320"/>
-          </a:xfrm>
-          <a:prstGeom prst="roundRect">
-            <a:avLst>
-              <a:gd name="adj" fmla="val 15000"/>
-            </a:avLst>
-          </a:prstGeom>
-          <a:solidFill>
-            <a:srgbClr val="151E33"/>
-          </a:solidFill>
-          <a:ln>
-            <a:noFill/>
-          </a:ln>
-        </p:spPr>
-        <p:style>
-          <a:lnRef idx="1">
-            <a:schemeClr val="accent1"/>
-          </a:lnRef>
-          <a:fillRef idx="3">
-            <a:schemeClr val="accent1"/>
-          </a:fillRef>
-          <a:effectRef idx="2">
-            <a:schemeClr val="accent1"/>
-          </a:effectRef>
-          <a:fontRef idx="minor">
-            <a:schemeClr val="lt1"/>
-          </a:fontRef>
-        </p:style>
-        <p:txBody>
-          <a:bodyPr rtlCol="0" anchor="ctr"/>
-          <a:lstStyle/>
-          <a:p>
-            <a:pPr algn="ctr"/>
-          </a:p>
-        </p:txBody>
-      </p:sp>
-      <p:sp>
-        <p:nvSpPr>
-          <p:cNvPr id="20" name="TextBox 19"/>
-          <p:cNvSpPr txBox="1"/>
-          <p:nvPr/>
-        </p:nvSpPr>
-        <p:spPr>
-          <a:xfrm>
-            <a:off x="914400" y="5980176"/>
-            <a:ext cx="10332720" cy="182880"/>
-          </a:xfrm>
-          <a:prstGeom prst="rect">
-            <a:avLst/>
-          </a:prstGeom>
-          <a:noFill/>
-        </p:spPr>
-        <p:txBody>
-          <a:bodyPr wrap="square" lIns="9144" rIns="9144" tIns="0" bIns="0">
-            <a:spAutoFit/>
-          </a:bodyPr>
-          <a:lstStyle/>
-          <a:p>
-            <a:pPr>
-              <a:spcAft>
-                <a:spcPts val="700"/>
-              </a:spcAft>
-              <a:defRPr sz="1000" b="0">
-                <a:solidFill>
-                  <a:srgbClr val="B8C4DD"/>
-                </a:solidFill>
-                <a:latin typeface="DejaVu Sans"/>
-              </a:defRPr>
-            </a:pPr>
-            <a:r>
-              <a:t>PRÓXIMO PASSO  /  Edite uma cor, crie outro card e teste novamente em uma tela estreita.</a:t>
+              <a:t>Uma página bem construída reúne organização, clareza visual e uma boa experiência.</a:t>
             </a:r>
           </a:p>
         </p:txBody>
@@ -15020,7 +12419,7 @@
               </a:defRPr>
             </a:pPr>
             <a:r>
-              <a:t>01 / VISÃO GERAL</a:t>
+              <a:t>01 / IMPORTÂNCIA</a:t>
             </a:r>
           </a:p>
         </p:txBody>
@@ -15059,7 +12458,7 @@
               </a:defRPr>
             </a:pPr>
             <a:r>
-              <a:t>O navegador conecta as duas camadas.</a:t>
+              <a:t>HTML + CSS: a base das interfaces web.</a:t>
             </a:r>
           </a:p>
         </p:txBody>
@@ -15098,7 +12497,7 @@
               </a:defRPr>
             </a:pPr>
             <a:r>
-              <a:t>HTML é uma linguagem de marcação. CSS é uma linguagem de estilos.</a:t>
+              <a:t>HTML organiza o conteúdo. CSS define a apresentação visual e o layout.</a:t>
             </a:r>
           </a:p>
         </p:txBody>
@@ -15876,923 +13275,7 @@
               </a:defRPr>
             </a:pPr>
             <a:r>
-              <a:t>JavaScript pode adicionar comportamento; nesta apresentação, o foco é HTML e CSS.</a:t>
-            </a:r>
-          </a:p>
-        </p:txBody>
-      </p:sp>
-    </p:spTree>
-  </p:cSld>
-  <p:clrMapOvr>
-    <a:masterClrMapping/>
-  </p:clrMapOvr>
-</p:sld>
-</file>
-
-<file path=ppt/slides/slide3.xml><?xml version="1.0" encoding="utf-8"?>
-<p:sld xmlns:a="http://schemas.openxmlformats.org/drawingml/2006/main" xmlns:p="http://schemas.openxmlformats.org/presentationml/2006/main" xmlns:r="http://schemas.openxmlformats.org/officeDocument/2006/relationships">
-  <p:cSld>
-    <p:bg>
-      <p:bgPr>
-        <a:solidFill>
-          <a:srgbClr val="0B1020"/>
-        </a:solidFill>
-        <a:effectLst/>
-      </p:bgPr>
-    </p:bg>
-    <p:spTree>
-      <p:nvGrpSpPr>
-        <p:cNvPr id="1" name=""/>
-        <p:cNvGrpSpPr/>
-        <p:nvPr/>
-      </p:nvGrpSpPr>
-      <p:grpSpPr/>
-      <p:sp>
-        <p:nvSpPr>
-          <p:cNvPr id="2" name="Rectangle 1"/>
-          <p:cNvSpPr/>
-          <p:nvPr/>
-        </p:nvSpPr>
-        <p:spPr>
-          <a:xfrm>
-            <a:off x="411480" y="384048"/>
-            <a:ext cx="54864" cy="201168"/>
-          </a:xfrm>
-          <a:prstGeom prst="rect">
-            <a:avLst/>
-          </a:prstGeom>
-          <a:solidFill>
-            <a:srgbClr val="6CE5D2"/>
-          </a:solidFill>
-          <a:ln>
-            <a:noFill/>
-          </a:ln>
-        </p:spPr>
-        <p:style>
-          <a:lnRef idx="1">
-            <a:schemeClr val="accent1"/>
-          </a:lnRef>
-          <a:fillRef idx="3">
-            <a:schemeClr val="accent1"/>
-          </a:fillRef>
-          <a:effectRef idx="2">
-            <a:schemeClr val="accent1"/>
-          </a:effectRef>
-          <a:fontRef idx="minor">
-            <a:schemeClr val="lt1"/>
-          </a:fontRef>
-        </p:style>
-        <p:txBody>
-          <a:bodyPr rtlCol="0" anchor="ctr"/>
-          <a:lstStyle/>
-          <a:p>
-            <a:pPr algn="ctr"/>
-          </a:p>
-        </p:txBody>
-      </p:sp>
-      <p:sp>
-        <p:nvSpPr>
-          <p:cNvPr id="3" name="TextBox 2"/>
-          <p:cNvSpPr txBox="1"/>
-          <p:nvPr/>
-        </p:nvSpPr>
-        <p:spPr>
-          <a:xfrm>
-            <a:off x="603504" y="329184"/>
-            <a:ext cx="9144000" cy="256032"/>
-          </a:xfrm>
-          <a:prstGeom prst="rect">
-            <a:avLst/>
-          </a:prstGeom>
-          <a:noFill/>
-        </p:spPr>
-        <p:txBody>
-          <a:bodyPr wrap="square" lIns="9144" rIns="9144" tIns="0" bIns="0">
-            <a:spAutoFit/>
-          </a:bodyPr>
-          <a:lstStyle/>
-          <a:p>
-            <a:pPr>
-              <a:spcAft>
-                <a:spcPts val="700"/>
-              </a:spcAft>
-              <a:defRPr sz="1000" b="1">
-                <a:solidFill>
-                  <a:srgbClr val="6CE5D2"/>
-                </a:solidFill>
-                <a:latin typeface="DejaVu Sans"/>
-              </a:defRPr>
-            </a:pPr>
-            <a:r>
-              <a:t>02 / IMPORTÂNCIA</a:t>
-            </a:r>
-          </a:p>
-        </p:txBody>
-      </p:sp>
-      <p:sp>
-        <p:nvSpPr>
-          <p:cNvPr id="4" name="TextBox 3"/>
-          <p:cNvSpPr txBox="1"/>
-          <p:nvPr/>
-        </p:nvSpPr>
-        <p:spPr>
-          <a:xfrm>
-            <a:off x="594360" y="859536"/>
-            <a:ext cx="10972800" cy="914400"/>
-          </a:xfrm>
-          <a:prstGeom prst="rect">
-            <a:avLst/>
-          </a:prstGeom>
-          <a:noFill/>
-        </p:spPr>
-        <p:txBody>
-          <a:bodyPr wrap="square" lIns="9144" rIns="9144" tIns="0" bIns="0">
-            <a:spAutoFit/>
-          </a:bodyPr>
-          <a:lstStyle/>
-          <a:p>
-            <a:pPr>
-              <a:spcAft>
-                <a:spcPts val="700"/>
-              </a:spcAft>
-              <a:defRPr sz="3100" b="1">
-                <a:solidFill>
-                  <a:srgbClr val="F4F7FF"/>
-                </a:solidFill>
-                <a:latin typeface="DejaVu Sans"/>
-              </a:defRPr>
-            </a:pPr>
-            <a:r>
-              <a:t>Onde isso aparece no mundo real?</a:t>
-            </a:r>
-          </a:p>
-        </p:txBody>
-      </p:sp>
-      <p:sp>
-        <p:nvSpPr>
-          <p:cNvPr id="5" name="TextBox 4"/>
-          <p:cNvSpPr txBox="1"/>
-          <p:nvPr/>
-        </p:nvSpPr>
-        <p:spPr>
-          <a:xfrm>
-            <a:off x="612648" y="1682496"/>
-            <a:ext cx="10972800" cy="502920"/>
-          </a:xfrm>
-          <a:prstGeom prst="rect">
-            <a:avLst/>
-          </a:prstGeom>
-          <a:noFill/>
-        </p:spPr>
-        <p:txBody>
-          <a:bodyPr wrap="square" lIns="9144" rIns="9144" tIns="0" bIns="0">
-            <a:spAutoFit/>
-          </a:bodyPr>
-          <a:lstStyle/>
-          <a:p>
-            <a:pPr>
-              <a:spcAft>
-                <a:spcPts val="700"/>
-              </a:spcAft>
-              <a:defRPr sz="1500" b="0">
-                <a:solidFill>
-                  <a:srgbClr val="B8C4DD"/>
-                </a:solidFill>
-                <a:latin typeface="DejaVu Sans"/>
-              </a:defRPr>
-            </a:pPr>
-            <a:r>
-              <a:t>Os mesmos fundamentos sustentam páginas simples e interfaces de sistemas complexos.</a:t>
-            </a:r>
-          </a:p>
-        </p:txBody>
-      </p:sp>
-      <p:sp>
-        <p:nvSpPr>
-          <p:cNvPr id="6" name="Rectangle 5"/>
-          <p:cNvSpPr/>
-          <p:nvPr/>
-        </p:nvSpPr>
-        <p:spPr>
-          <a:xfrm>
-            <a:off x="594360" y="6437376"/>
-            <a:ext cx="11000232" cy="10972"/>
-          </a:xfrm>
-          <a:prstGeom prst="rect">
-            <a:avLst/>
-          </a:prstGeom>
-          <a:solidFill>
-            <a:srgbClr val="2A3854"/>
-          </a:solidFill>
-          <a:ln>
-            <a:noFill/>
-          </a:ln>
-        </p:spPr>
-        <p:style>
-          <a:lnRef idx="1">
-            <a:schemeClr val="accent1"/>
-          </a:lnRef>
-          <a:fillRef idx="3">
-            <a:schemeClr val="accent1"/>
-          </a:fillRef>
-          <a:effectRef idx="2">
-            <a:schemeClr val="accent1"/>
-          </a:effectRef>
-          <a:fontRef idx="minor">
-            <a:schemeClr val="lt1"/>
-          </a:fontRef>
-        </p:style>
-        <p:txBody>
-          <a:bodyPr rtlCol="0" anchor="ctr"/>
-          <a:lstStyle/>
-          <a:p>
-            <a:pPr algn="ctr"/>
-          </a:p>
-        </p:txBody>
-      </p:sp>
-      <p:sp>
-        <p:nvSpPr>
-          <p:cNvPr id="7" name="TextBox 6"/>
-          <p:cNvSpPr txBox="1"/>
-          <p:nvPr/>
-        </p:nvSpPr>
-        <p:spPr>
-          <a:xfrm>
-            <a:off x="612648" y="6547104"/>
-            <a:ext cx="8229600" cy="182880"/>
-          </a:xfrm>
-          <a:prstGeom prst="rect">
-            <a:avLst/>
-          </a:prstGeom>
-          <a:noFill/>
-        </p:spPr>
-        <p:txBody>
-          <a:bodyPr wrap="square" lIns="9144" rIns="9144" tIns="0" bIns="0">
-            <a:spAutoFit/>
-          </a:bodyPr>
-          <a:lstStyle/>
-          <a:p>
-            <a:pPr>
-              <a:spcAft>
-                <a:spcPts val="700"/>
-              </a:spcAft>
-              <a:defRPr sz="800" b="0">
-                <a:solidFill>
-                  <a:srgbClr val="B8C4DD"/>
-                </a:solidFill>
-                <a:latin typeface="DejaVu Sans"/>
-              </a:defRPr>
-            </a:pPr>
-            <a:r>
-              <a:t>DESENVOLVIMENTO DE SISTEMAS     /     TEMA 03     /     HTML + CSS</a:t>
-            </a:r>
-          </a:p>
-        </p:txBody>
-      </p:sp>
-      <p:sp>
-        <p:nvSpPr>
-          <p:cNvPr id="8" name="TextBox 7"/>
-          <p:cNvSpPr txBox="1"/>
-          <p:nvPr/>
-        </p:nvSpPr>
-        <p:spPr>
-          <a:xfrm>
-            <a:off x="11000232" y="6501384"/>
-            <a:ext cx="548640" cy="228600"/>
-          </a:xfrm>
-          <a:prstGeom prst="rect">
-            <a:avLst/>
-          </a:prstGeom>
-          <a:noFill/>
-        </p:spPr>
-        <p:txBody>
-          <a:bodyPr wrap="square" lIns="9144" rIns="9144" tIns="0" bIns="0">
-            <a:spAutoFit/>
-          </a:bodyPr>
-          <a:lstStyle/>
-          <a:p>
-            <a:pPr>
-              <a:spcAft>
-                <a:spcPts val="700"/>
-              </a:spcAft>
-              <a:defRPr sz="1100" b="1">
-                <a:solidFill>
-                  <a:srgbClr val="6CE5D2"/>
-                </a:solidFill>
-                <a:latin typeface="DejaVu Sans"/>
-              </a:defRPr>
-            </a:pPr>
-            <a:r>
-              <a:t>03</a:t>
-            </a:r>
-          </a:p>
-        </p:txBody>
-      </p:sp>
-      <p:sp>
-        <p:nvSpPr>
-          <p:cNvPr id="9" name="Rounded Rectangle 8"/>
-          <p:cNvSpPr/>
-          <p:nvPr/>
-        </p:nvSpPr>
-        <p:spPr>
-          <a:xfrm>
-            <a:off x="640080" y="2606040"/>
-            <a:ext cx="3154680" cy="2788920"/>
-          </a:xfrm>
-          <a:prstGeom prst="roundRect">
-            <a:avLst>
-              <a:gd name="adj" fmla="val 15000"/>
-            </a:avLst>
-          </a:prstGeom>
-          <a:solidFill>
-            <a:srgbClr val="151E33"/>
-          </a:solidFill>
-          <a:ln>
-            <a:solidFill>
-              <a:srgbClr val="2A3854"/>
-            </a:solidFill>
-          </a:ln>
-        </p:spPr>
-        <p:style>
-          <a:lnRef idx="1">
-            <a:schemeClr val="accent1"/>
-          </a:lnRef>
-          <a:fillRef idx="3">
-            <a:schemeClr val="accent1"/>
-          </a:fillRef>
-          <a:effectRef idx="2">
-            <a:schemeClr val="accent1"/>
-          </a:effectRef>
-          <a:fontRef idx="minor">
-            <a:schemeClr val="lt1"/>
-          </a:fontRef>
-        </p:style>
-        <p:txBody>
-          <a:bodyPr rtlCol="0" anchor="ctr"/>
-          <a:lstStyle/>
-          <a:p>
-            <a:pPr algn="ctr"/>
-          </a:p>
-        </p:txBody>
-      </p:sp>
-      <p:sp>
-        <p:nvSpPr>
-          <p:cNvPr id="10" name="TextBox 9"/>
-          <p:cNvSpPr txBox="1"/>
-          <p:nvPr/>
-        </p:nvSpPr>
-        <p:spPr>
-          <a:xfrm>
-            <a:off x="841247" y="2834640"/>
-            <a:ext cx="2743200" cy="457200"/>
-          </a:xfrm>
-          <a:prstGeom prst="rect">
-            <a:avLst/>
-          </a:prstGeom>
-          <a:noFill/>
-        </p:spPr>
-        <p:txBody>
-          <a:bodyPr wrap="square" lIns="9144" rIns="9144" tIns="0" bIns="0">
-            <a:spAutoFit/>
-          </a:bodyPr>
-          <a:lstStyle/>
-          <a:p>
-            <a:pPr>
-              <a:spcAft>
-                <a:spcPts val="700"/>
-              </a:spcAft>
-              <a:defRPr sz="2800" b="1">
-                <a:solidFill>
-                  <a:srgbClr val="6CE5D2"/>
-                </a:solidFill>
-                <a:latin typeface="DejaVu Sans Mono"/>
-              </a:defRPr>
-            </a:pPr>
-            <a:r>
-              <a:t>01</a:t>
-            </a:r>
-          </a:p>
-        </p:txBody>
-      </p:sp>
-      <p:sp>
-        <p:nvSpPr>
-          <p:cNvPr id="11" name="TextBox 10"/>
-          <p:cNvSpPr txBox="1"/>
-          <p:nvPr/>
-        </p:nvSpPr>
-        <p:spPr>
-          <a:xfrm>
-            <a:off x="841247" y="3520440"/>
-            <a:ext cx="2788920" cy="457200"/>
-          </a:xfrm>
-          <a:prstGeom prst="rect">
-            <a:avLst/>
-          </a:prstGeom>
-          <a:noFill/>
-        </p:spPr>
-        <p:txBody>
-          <a:bodyPr wrap="square" lIns="9144" rIns="9144" tIns="0" bIns="0">
-            <a:spAutoFit/>
-          </a:bodyPr>
-          <a:lstStyle/>
-          <a:p>
-            <a:pPr>
-              <a:spcAft>
-                <a:spcPts val="700"/>
-              </a:spcAft>
-              <a:defRPr sz="1900" b="1">
-                <a:solidFill>
-                  <a:srgbClr val="F4F7FF"/>
-                </a:solidFill>
-                <a:latin typeface="DejaVu Sans"/>
-              </a:defRPr>
-            </a:pPr>
-            <a:r>
-              <a:t>Sites e portfólios</a:t>
-            </a:r>
-          </a:p>
-        </p:txBody>
-      </p:sp>
-      <p:sp>
-        <p:nvSpPr>
-          <p:cNvPr id="12" name="TextBox 11"/>
-          <p:cNvSpPr txBox="1"/>
-          <p:nvPr/>
-        </p:nvSpPr>
-        <p:spPr>
-          <a:xfrm>
-            <a:off x="841247" y="4096512"/>
-            <a:ext cx="2697480" cy="960120"/>
-          </a:xfrm>
-          <a:prstGeom prst="rect">
-            <a:avLst/>
-          </a:prstGeom>
-          <a:noFill/>
-        </p:spPr>
-        <p:txBody>
-          <a:bodyPr wrap="square" lIns="9144" rIns="9144" tIns="0" bIns="0">
-            <a:spAutoFit/>
-          </a:bodyPr>
-          <a:lstStyle/>
-          <a:p>
-            <a:pPr>
-              <a:spcAft>
-                <a:spcPts val="700"/>
-              </a:spcAft>
-              <a:defRPr sz="1500" b="0">
-                <a:solidFill>
-                  <a:srgbClr val="B8C4DD"/>
-                </a:solidFill>
-                <a:latin typeface="DejaVu Sans"/>
-              </a:defRPr>
-            </a:pPr>
-            <a:r>
-              <a:t>Conteúdo organizado, identidade visual e navegação clara.</a:t>
-            </a:r>
-          </a:p>
-        </p:txBody>
-      </p:sp>
-      <p:sp>
-        <p:nvSpPr>
-          <p:cNvPr id="13" name="TextBox 12"/>
-          <p:cNvSpPr txBox="1"/>
-          <p:nvPr/>
-        </p:nvSpPr>
-        <p:spPr>
-          <a:xfrm>
-            <a:off x="804671" y="5632704"/>
-            <a:ext cx="2880360" cy="457200"/>
-          </a:xfrm>
-          <a:prstGeom prst="rect">
-            <a:avLst/>
-          </a:prstGeom>
-          <a:noFill/>
-        </p:spPr>
-        <p:txBody>
-          <a:bodyPr wrap="square" lIns="9144" rIns="9144" tIns="0" bIns="0">
-            <a:spAutoFit/>
-          </a:bodyPr>
-          <a:lstStyle/>
-          <a:p>
-            <a:pPr>
-              <a:spcAft>
-                <a:spcPts val="700"/>
-              </a:spcAft>
-              <a:defRPr sz="1000" b="1">
-                <a:solidFill>
-                  <a:srgbClr val="6CE5D2"/>
-                </a:solidFill>
-                <a:latin typeface="DejaVu Sans"/>
-              </a:defRPr>
-            </a:pPr>
-            <a:r>
-              <a:t>PRESENÇA DIGITAL</a:t>
-            </a:r>
-          </a:p>
-        </p:txBody>
-      </p:sp>
-      <p:sp>
-        <p:nvSpPr>
-          <p:cNvPr id="14" name="Rounded Rectangle 13"/>
-          <p:cNvSpPr/>
-          <p:nvPr/>
-        </p:nvSpPr>
-        <p:spPr>
-          <a:xfrm>
-            <a:off x="4526280" y="2606040"/>
-            <a:ext cx="3154680" cy="2788920"/>
-          </a:xfrm>
-          <a:prstGeom prst="roundRect">
-            <a:avLst>
-              <a:gd name="adj" fmla="val 15000"/>
-            </a:avLst>
-          </a:prstGeom>
-          <a:solidFill>
-            <a:srgbClr val="151E33"/>
-          </a:solidFill>
-          <a:ln>
-            <a:solidFill>
-              <a:srgbClr val="2A3854"/>
-            </a:solidFill>
-          </a:ln>
-        </p:spPr>
-        <p:style>
-          <a:lnRef idx="1">
-            <a:schemeClr val="accent1"/>
-          </a:lnRef>
-          <a:fillRef idx="3">
-            <a:schemeClr val="accent1"/>
-          </a:fillRef>
-          <a:effectRef idx="2">
-            <a:schemeClr val="accent1"/>
-          </a:effectRef>
-          <a:fontRef idx="minor">
-            <a:schemeClr val="lt1"/>
-          </a:fontRef>
-        </p:style>
-        <p:txBody>
-          <a:bodyPr rtlCol="0" anchor="ctr"/>
-          <a:lstStyle/>
-          <a:p>
-            <a:pPr algn="ctr"/>
-          </a:p>
-        </p:txBody>
-      </p:sp>
-      <p:sp>
-        <p:nvSpPr>
-          <p:cNvPr id="15" name="TextBox 14"/>
-          <p:cNvSpPr txBox="1"/>
-          <p:nvPr/>
-        </p:nvSpPr>
-        <p:spPr>
-          <a:xfrm>
-            <a:off x="4727448" y="2834640"/>
-            <a:ext cx="2743200" cy="457200"/>
-          </a:xfrm>
-          <a:prstGeom prst="rect">
-            <a:avLst/>
-          </a:prstGeom>
-          <a:noFill/>
-        </p:spPr>
-        <p:txBody>
-          <a:bodyPr wrap="square" lIns="9144" rIns="9144" tIns="0" bIns="0">
-            <a:spAutoFit/>
-          </a:bodyPr>
-          <a:lstStyle/>
-          <a:p>
-            <a:pPr>
-              <a:spcAft>
-                <a:spcPts val="700"/>
-              </a:spcAft>
-              <a:defRPr sz="2800" b="1">
-                <a:solidFill>
-                  <a:srgbClr val="6CE5D2"/>
-                </a:solidFill>
-                <a:latin typeface="DejaVu Sans Mono"/>
-              </a:defRPr>
-            </a:pPr>
-            <a:r>
-              <a:t>02</a:t>
-            </a:r>
-          </a:p>
-        </p:txBody>
-      </p:sp>
-      <p:sp>
-        <p:nvSpPr>
-          <p:cNvPr id="16" name="TextBox 15"/>
-          <p:cNvSpPr txBox="1"/>
-          <p:nvPr/>
-        </p:nvSpPr>
-        <p:spPr>
-          <a:xfrm>
-            <a:off x="4727448" y="3520440"/>
-            <a:ext cx="2788920" cy="457200"/>
-          </a:xfrm>
-          <a:prstGeom prst="rect">
-            <a:avLst/>
-          </a:prstGeom>
-          <a:noFill/>
-        </p:spPr>
-        <p:txBody>
-          <a:bodyPr wrap="square" lIns="9144" rIns="9144" tIns="0" bIns="0">
-            <a:spAutoFit/>
-          </a:bodyPr>
-          <a:lstStyle/>
-          <a:p>
-            <a:pPr>
-              <a:spcAft>
-                <a:spcPts val="700"/>
-              </a:spcAft>
-              <a:defRPr sz="1900" b="1">
-                <a:solidFill>
-                  <a:srgbClr val="F4F7FF"/>
-                </a:solidFill>
-                <a:latin typeface="DejaVu Sans"/>
-              </a:defRPr>
-            </a:pPr>
-            <a:r>
-              <a:t>Sistemas e painéis</a:t>
-            </a:r>
-          </a:p>
-        </p:txBody>
-      </p:sp>
-      <p:sp>
-        <p:nvSpPr>
-          <p:cNvPr id="17" name="TextBox 16"/>
-          <p:cNvSpPr txBox="1"/>
-          <p:nvPr/>
-        </p:nvSpPr>
-        <p:spPr>
-          <a:xfrm>
-            <a:off x="4727448" y="4096512"/>
-            <a:ext cx="2697480" cy="960120"/>
-          </a:xfrm>
-          <a:prstGeom prst="rect">
-            <a:avLst/>
-          </a:prstGeom>
-          <a:noFill/>
-        </p:spPr>
-        <p:txBody>
-          <a:bodyPr wrap="square" lIns="9144" rIns="9144" tIns="0" bIns="0">
-            <a:spAutoFit/>
-          </a:bodyPr>
-          <a:lstStyle/>
-          <a:p>
-            <a:pPr>
-              <a:spcAft>
-                <a:spcPts val="700"/>
-              </a:spcAft>
-              <a:defRPr sz="1500" b="0">
-                <a:solidFill>
-                  <a:srgbClr val="B8C4DD"/>
-                </a:solidFill>
-                <a:latin typeface="DejaVu Sans"/>
-              </a:defRPr>
-            </a:pPr>
-            <a:r>
-              <a:t>Formulários, menus, tabelas e interfaces administrativas.</a:t>
-            </a:r>
-          </a:p>
-        </p:txBody>
-      </p:sp>
-      <p:sp>
-        <p:nvSpPr>
-          <p:cNvPr id="18" name="TextBox 17"/>
-          <p:cNvSpPr txBox="1"/>
-          <p:nvPr/>
-        </p:nvSpPr>
-        <p:spPr>
-          <a:xfrm>
-            <a:off x="4690872" y="5632704"/>
-            <a:ext cx="2880360" cy="457200"/>
-          </a:xfrm>
-          <a:prstGeom prst="rect">
-            <a:avLst/>
-          </a:prstGeom>
-          <a:noFill/>
-        </p:spPr>
-        <p:txBody>
-          <a:bodyPr wrap="square" lIns="9144" rIns="9144" tIns="0" bIns="0">
-            <a:spAutoFit/>
-          </a:bodyPr>
-          <a:lstStyle/>
-          <a:p>
-            <a:pPr>
-              <a:spcAft>
-                <a:spcPts val="700"/>
-              </a:spcAft>
-              <a:defRPr sz="1000" b="1">
-                <a:solidFill>
-                  <a:srgbClr val="6CE5D2"/>
-                </a:solidFill>
-                <a:latin typeface="DejaVu Sans"/>
-              </a:defRPr>
-            </a:pPr>
-            <a:r>
-              <a:t>USO PROFISSIONAL</a:t>
-            </a:r>
-          </a:p>
-        </p:txBody>
-      </p:sp>
-      <p:sp>
-        <p:nvSpPr>
-          <p:cNvPr id="19" name="Rounded Rectangle 18"/>
-          <p:cNvSpPr/>
-          <p:nvPr/>
-        </p:nvSpPr>
-        <p:spPr>
-          <a:xfrm>
-            <a:off x="8412480" y="2606040"/>
-            <a:ext cx="3154680" cy="2788920"/>
-          </a:xfrm>
-          <a:prstGeom prst="roundRect">
-            <a:avLst>
-              <a:gd name="adj" fmla="val 15000"/>
-            </a:avLst>
-          </a:prstGeom>
-          <a:solidFill>
-            <a:srgbClr val="151E33"/>
-          </a:solidFill>
-          <a:ln>
-            <a:solidFill>
-              <a:srgbClr val="2A3854"/>
-            </a:solidFill>
-          </a:ln>
-        </p:spPr>
-        <p:style>
-          <a:lnRef idx="1">
-            <a:schemeClr val="accent1"/>
-          </a:lnRef>
-          <a:fillRef idx="3">
-            <a:schemeClr val="accent1"/>
-          </a:fillRef>
-          <a:effectRef idx="2">
-            <a:schemeClr val="accent1"/>
-          </a:effectRef>
-          <a:fontRef idx="minor">
-            <a:schemeClr val="lt1"/>
-          </a:fontRef>
-        </p:style>
-        <p:txBody>
-          <a:bodyPr rtlCol="0" anchor="ctr"/>
-          <a:lstStyle/>
-          <a:p>
-            <a:pPr algn="ctr"/>
-          </a:p>
-        </p:txBody>
-      </p:sp>
-      <p:sp>
-        <p:nvSpPr>
-          <p:cNvPr id="20" name="TextBox 19"/>
-          <p:cNvSpPr txBox="1"/>
-          <p:nvPr/>
-        </p:nvSpPr>
-        <p:spPr>
-          <a:xfrm>
-            <a:off x="8613648" y="2834640"/>
-            <a:ext cx="2743200" cy="457200"/>
-          </a:xfrm>
-          <a:prstGeom prst="rect">
-            <a:avLst/>
-          </a:prstGeom>
-          <a:noFill/>
-        </p:spPr>
-        <p:txBody>
-          <a:bodyPr wrap="square" lIns="9144" rIns="9144" tIns="0" bIns="0">
-            <a:spAutoFit/>
-          </a:bodyPr>
-          <a:lstStyle/>
-          <a:p>
-            <a:pPr>
-              <a:spcAft>
-                <a:spcPts val="700"/>
-              </a:spcAft>
-              <a:defRPr sz="2800" b="1">
-                <a:solidFill>
-                  <a:srgbClr val="6CE5D2"/>
-                </a:solidFill>
-                <a:latin typeface="DejaVu Sans Mono"/>
-              </a:defRPr>
-            </a:pPr>
-            <a:r>
-              <a:t>03</a:t>
-            </a:r>
-          </a:p>
-        </p:txBody>
-      </p:sp>
-      <p:sp>
-        <p:nvSpPr>
-          <p:cNvPr id="21" name="TextBox 20"/>
-          <p:cNvSpPr txBox="1"/>
-          <p:nvPr/>
-        </p:nvSpPr>
-        <p:spPr>
-          <a:xfrm>
-            <a:off x="8613648" y="3520440"/>
-            <a:ext cx="2788920" cy="457200"/>
-          </a:xfrm>
-          <a:prstGeom prst="rect">
-            <a:avLst/>
-          </a:prstGeom>
-          <a:noFill/>
-        </p:spPr>
-        <p:txBody>
-          <a:bodyPr wrap="square" lIns="9144" rIns="9144" tIns="0" bIns="0">
-            <a:spAutoFit/>
-          </a:bodyPr>
-          <a:lstStyle/>
-          <a:p>
-            <a:pPr>
-              <a:spcAft>
-                <a:spcPts val="700"/>
-              </a:spcAft>
-              <a:defRPr sz="1900" b="1">
-                <a:solidFill>
-                  <a:srgbClr val="F4F7FF"/>
-                </a:solidFill>
-                <a:latin typeface="DejaVu Sans"/>
-              </a:defRPr>
-            </a:pPr>
-            <a:r>
-              <a:t>Lojas e serviços</a:t>
-            </a:r>
-          </a:p>
-        </p:txBody>
-      </p:sp>
-      <p:sp>
-        <p:nvSpPr>
-          <p:cNvPr id="22" name="TextBox 21"/>
-          <p:cNvSpPr txBox="1"/>
-          <p:nvPr/>
-        </p:nvSpPr>
-        <p:spPr>
-          <a:xfrm>
-            <a:off x="8613648" y="4096512"/>
-            <a:ext cx="2697480" cy="960120"/>
-          </a:xfrm>
-          <a:prstGeom prst="rect">
-            <a:avLst/>
-          </a:prstGeom>
-          <a:noFill/>
-        </p:spPr>
-        <p:txBody>
-          <a:bodyPr wrap="square" lIns="9144" rIns="9144" tIns="0" bIns="0">
-            <a:spAutoFit/>
-          </a:bodyPr>
-          <a:lstStyle/>
-          <a:p>
-            <a:pPr>
-              <a:spcAft>
-                <a:spcPts val="700"/>
-              </a:spcAft>
-              <a:defRPr sz="1500" b="0">
-                <a:solidFill>
-                  <a:srgbClr val="B8C4DD"/>
-                </a:solidFill>
-                <a:latin typeface="DejaVu Sans"/>
-              </a:defRPr>
-            </a:pPr>
-            <a:r>
-              <a:t>Catálogo em cards, busca de produtos e telas de cadastro.</a:t>
-            </a:r>
-          </a:p>
-        </p:txBody>
-      </p:sp>
-      <p:sp>
-        <p:nvSpPr>
-          <p:cNvPr id="23" name="TextBox 22"/>
-          <p:cNvSpPr txBox="1"/>
-          <p:nvPr/>
-        </p:nvSpPr>
-        <p:spPr>
-          <a:xfrm>
-            <a:off x="8577072" y="5632704"/>
-            <a:ext cx="2880360" cy="457200"/>
-          </a:xfrm>
-          <a:prstGeom prst="rect">
-            <a:avLst/>
-          </a:prstGeom>
-          <a:noFill/>
-        </p:spPr>
-        <p:txBody>
-          <a:bodyPr wrap="square" lIns="9144" rIns="9144" tIns="0" bIns="0">
-            <a:spAutoFit/>
-          </a:bodyPr>
-          <a:lstStyle/>
-          <a:p>
-            <a:pPr>
-              <a:spcAft>
-                <a:spcPts val="700"/>
-              </a:spcAft>
-              <a:defRPr sz="1000" b="1">
-                <a:solidFill>
-                  <a:srgbClr val="6CE5D2"/>
-                </a:solidFill>
-                <a:latin typeface="DejaVu Sans"/>
-              </a:defRPr>
-            </a:pPr>
-            <a:r>
-              <a:t>EXPERIÊNCIA DO USUÁRIO</a:t>
+              <a:t>Essa base está presente em sites, lojas virtuais, cadastros e painéis de sistemas.</a:t>
             </a:r>
           </a:p>
         </p:txBody>
@@ -16900,7 +13383,7 @@
               </a:defRPr>
             </a:pPr>
             <a:r>
-              <a:t>03 / ESTRUTURA HTML</a:t>
+              <a:t>02 / ESTRUTURA HTML</a:t>
             </a:r>
           </a:p>
         </p:txBody>
@@ -17060,7 +13543,7 @@
               </a:defRPr>
             </a:pPr>
             <a:r>
-              <a:t>04</a:t>
+              <a:t>03</a:t>
             </a:r>
           </a:p>
         </p:txBody>
@@ -18719,7 +15202,7 @@
               </a:defRPr>
             </a:pPr>
             <a:r>
-              <a:t>04 / PRINCIPAIS TAGS</a:t>
+              <a:t>03 / PRINCIPAIS TAGS</a:t>
             </a:r>
           </a:p>
         </p:txBody>
@@ -18918,7 +15401,7 @@
               </a:defRPr>
             </a:pPr>
             <a:r>
-              <a:t>05</a:t>
+              <a:t>04</a:t>
             </a:r>
           </a:p>
         </p:txBody>
@@ -19854,7 +16337,7 @@
               </a:defRPr>
             </a:pPr>
             <a:r>
-              <a:t>05 / FORMULÁRIOS</a:t>
+              <a:t>04 / FORMULÁRIOS</a:t>
             </a:r>
           </a:p>
         </p:txBody>
@@ -20014,7 +16497,7 @@
               </a:defRPr>
             </a:pPr>
             <a:r>
-              <a:t>06</a:t>
+              <a:t>05</a:t>
             </a:r>
           </a:p>
         </p:txBody>
@@ -21667,7 +18150,7 @@
               </a:defRPr>
             </a:pPr>
             <a:r>
-              <a:t>06 / REGRAS CSS</a:t>
+              <a:t>05 / REGRAS CSS</a:t>
             </a:r>
           </a:p>
         </p:txBody>
@@ -21827,7 +18310,7 @@
               </a:defRPr>
             </a:pPr>
             <a:r>
-              <a:t>07</a:t>
+              <a:t>06</a:t>
             </a:r>
           </a:p>
         </p:txBody>
@@ -22892,7 +19375,7 @@
               </a:defRPr>
             </a:pPr>
             <a:r>
-              <a:t>07 / CLASSES, IDs E ESTADOS</a:t>
+              <a:t>06 / CLASSES, IDs E ESTADOS</a:t>
             </a:r>
           </a:p>
         </p:txBody>
@@ -23091,7 +19574,7 @@
               </a:defRPr>
             </a:pPr>
             <a:r>
-              <a:t>08</a:t>
+              <a:t>07</a:t>
             </a:r>
           </a:p>
         </p:txBody>
@@ -24048,1397 +20531,6 @@
             </a:pPr>
             <a:r>
               <a:t>Exemplo: &lt;article class="card destaque" id="curso-html"&gt;…&lt;/article&gt;</a:t>
-            </a:r>
-          </a:p>
-        </p:txBody>
-      </p:sp>
-    </p:spTree>
-  </p:cSld>
-  <p:clrMapOvr>
-    <a:masterClrMapping/>
-  </p:clrMapOvr>
-</p:sld>
-</file>
-
-<file path=ppt/slides/slide9.xml><?xml version="1.0" encoding="utf-8"?>
-<p:sld xmlns:a="http://schemas.openxmlformats.org/drawingml/2006/main" xmlns:p="http://schemas.openxmlformats.org/presentationml/2006/main" xmlns:r="http://schemas.openxmlformats.org/officeDocument/2006/relationships">
-  <p:cSld>
-    <p:bg>
-      <p:bgPr>
-        <a:solidFill>
-          <a:srgbClr val="0B1020"/>
-        </a:solidFill>
-        <a:effectLst/>
-      </p:bgPr>
-    </p:bg>
-    <p:spTree>
-      <p:nvGrpSpPr>
-        <p:cNvPr id="1" name=""/>
-        <p:cNvGrpSpPr/>
-        <p:nvPr/>
-      </p:nvGrpSpPr>
-      <p:grpSpPr/>
-      <p:sp>
-        <p:nvSpPr>
-          <p:cNvPr id="2" name="Rectangle 1"/>
-          <p:cNvSpPr/>
-          <p:nvPr/>
-        </p:nvSpPr>
-        <p:spPr>
-          <a:xfrm>
-            <a:off x="411480" y="384048"/>
-            <a:ext cx="54864" cy="201168"/>
-          </a:xfrm>
-          <a:prstGeom prst="rect">
-            <a:avLst/>
-          </a:prstGeom>
-          <a:solidFill>
-            <a:srgbClr val="6CE5D2"/>
-          </a:solidFill>
-          <a:ln>
-            <a:noFill/>
-          </a:ln>
-        </p:spPr>
-        <p:style>
-          <a:lnRef idx="1">
-            <a:schemeClr val="accent1"/>
-          </a:lnRef>
-          <a:fillRef idx="3">
-            <a:schemeClr val="accent1"/>
-          </a:fillRef>
-          <a:effectRef idx="2">
-            <a:schemeClr val="accent1"/>
-          </a:effectRef>
-          <a:fontRef idx="minor">
-            <a:schemeClr val="lt1"/>
-          </a:fontRef>
-        </p:style>
-        <p:txBody>
-          <a:bodyPr rtlCol="0" anchor="ctr"/>
-          <a:lstStyle/>
-          <a:p>
-            <a:pPr algn="ctr"/>
-          </a:p>
-        </p:txBody>
-      </p:sp>
-      <p:sp>
-        <p:nvSpPr>
-          <p:cNvPr id="3" name="TextBox 2"/>
-          <p:cNvSpPr txBox="1"/>
-          <p:nvPr/>
-        </p:nvSpPr>
-        <p:spPr>
-          <a:xfrm>
-            <a:off x="603504" y="329184"/>
-            <a:ext cx="9144000" cy="256032"/>
-          </a:xfrm>
-          <a:prstGeom prst="rect">
-            <a:avLst/>
-          </a:prstGeom>
-          <a:noFill/>
-        </p:spPr>
-        <p:txBody>
-          <a:bodyPr wrap="square" lIns="9144" rIns="9144" tIns="0" bIns="0">
-            <a:spAutoFit/>
-          </a:bodyPr>
-          <a:lstStyle/>
-          <a:p>
-            <a:pPr>
-              <a:spcAft>
-                <a:spcPts val="700"/>
-              </a:spcAft>
-              <a:defRPr sz="1000" b="1">
-                <a:solidFill>
-                  <a:srgbClr val="6CE5D2"/>
-                </a:solidFill>
-                <a:latin typeface="DejaVu Sans"/>
-              </a:defRPr>
-            </a:pPr>
-            <a:r>
-              <a:t>08 / CASCATA E ESPECIFICIDADE</a:t>
-            </a:r>
-          </a:p>
-        </p:txBody>
-      </p:sp>
-      <p:sp>
-        <p:nvSpPr>
-          <p:cNvPr id="4" name="TextBox 3"/>
-          <p:cNvSpPr txBox="1"/>
-          <p:nvPr/>
-        </p:nvSpPr>
-        <p:spPr>
-          <a:xfrm>
-            <a:off x="594360" y="859536"/>
-            <a:ext cx="10972800" cy="914400"/>
-          </a:xfrm>
-          <a:prstGeom prst="rect">
-            <a:avLst/>
-          </a:prstGeom>
-          <a:noFill/>
-        </p:spPr>
-        <p:txBody>
-          <a:bodyPr wrap="square" lIns="9144" rIns="9144" tIns="0" bIns="0">
-            <a:spAutoFit/>
-          </a:bodyPr>
-          <a:lstStyle/>
-          <a:p>
-            <a:pPr>
-              <a:spcAft>
-                <a:spcPts val="700"/>
-              </a:spcAft>
-              <a:defRPr sz="3100" b="1">
-                <a:solidFill>
-                  <a:srgbClr val="F4F7FF"/>
-                </a:solidFill>
-                <a:latin typeface="DejaVu Sans"/>
-              </a:defRPr>
-            </a:pPr>
-            <a:r>
-              <a:t>Quando duas regras disputam o mesmo estilo.</a:t>
-            </a:r>
-          </a:p>
-        </p:txBody>
-      </p:sp>
-      <p:sp>
-        <p:nvSpPr>
-          <p:cNvPr id="5" name="Rectangle 4"/>
-          <p:cNvSpPr/>
-          <p:nvPr/>
-        </p:nvSpPr>
-        <p:spPr>
-          <a:xfrm>
-            <a:off x="594360" y="6437376"/>
-            <a:ext cx="11000232" cy="10972"/>
-          </a:xfrm>
-          <a:prstGeom prst="rect">
-            <a:avLst/>
-          </a:prstGeom>
-          <a:solidFill>
-            <a:srgbClr val="2A3854"/>
-          </a:solidFill>
-          <a:ln>
-            <a:noFill/>
-          </a:ln>
-        </p:spPr>
-        <p:style>
-          <a:lnRef idx="1">
-            <a:schemeClr val="accent1"/>
-          </a:lnRef>
-          <a:fillRef idx="3">
-            <a:schemeClr val="accent1"/>
-          </a:fillRef>
-          <a:effectRef idx="2">
-            <a:schemeClr val="accent1"/>
-          </a:effectRef>
-          <a:fontRef idx="minor">
-            <a:schemeClr val="lt1"/>
-          </a:fontRef>
-        </p:style>
-        <p:txBody>
-          <a:bodyPr rtlCol="0" anchor="ctr"/>
-          <a:lstStyle/>
-          <a:p>
-            <a:pPr algn="ctr"/>
-          </a:p>
-        </p:txBody>
-      </p:sp>
-      <p:sp>
-        <p:nvSpPr>
-          <p:cNvPr id="6" name="TextBox 5"/>
-          <p:cNvSpPr txBox="1"/>
-          <p:nvPr/>
-        </p:nvSpPr>
-        <p:spPr>
-          <a:xfrm>
-            <a:off x="612648" y="6547104"/>
-            <a:ext cx="8229600" cy="182880"/>
-          </a:xfrm>
-          <a:prstGeom prst="rect">
-            <a:avLst/>
-          </a:prstGeom>
-          <a:noFill/>
-        </p:spPr>
-        <p:txBody>
-          <a:bodyPr wrap="square" lIns="9144" rIns="9144" tIns="0" bIns="0">
-            <a:spAutoFit/>
-          </a:bodyPr>
-          <a:lstStyle/>
-          <a:p>
-            <a:pPr>
-              <a:spcAft>
-                <a:spcPts val="700"/>
-              </a:spcAft>
-              <a:defRPr sz="800" b="0">
-                <a:solidFill>
-                  <a:srgbClr val="B8C4DD"/>
-                </a:solidFill>
-                <a:latin typeface="DejaVu Sans"/>
-              </a:defRPr>
-            </a:pPr>
-            <a:r>
-              <a:t>DESENVOLVIMENTO DE SISTEMAS     /     TEMA 03     /     HTML + CSS</a:t>
-            </a:r>
-          </a:p>
-        </p:txBody>
-      </p:sp>
-      <p:sp>
-        <p:nvSpPr>
-          <p:cNvPr id="7" name="TextBox 6"/>
-          <p:cNvSpPr txBox="1"/>
-          <p:nvPr/>
-        </p:nvSpPr>
-        <p:spPr>
-          <a:xfrm>
-            <a:off x="11000232" y="6501384"/>
-            <a:ext cx="548640" cy="228600"/>
-          </a:xfrm>
-          <a:prstGeom prst="rect">
-            <a:avLst/>
-          </a:prstGeom>
-          <a:noFill/>
-        </p:spPr>
-        <p:txBody>
-          <a:bodyPr wrap="square" lIns="9144" rIns="9144" tIns="0" bIns="0">
-            <a:spAutoFit/>
-          </a:bodyPr>
-          <a:lstStyle/>
-          <a:p>
-            <a:pPr>
-              <a:spcAft>
-                <a:spcPts val="700"/>
-              </a:spcAft>
-              <a:defRPr sz="1100" b="1">
-                <a:solidFill>
-                  <a:srgbClr val="6CE5D2"/>
-                </a:solidFill>
-                <a:latin typeface="DejaVu Sans"/>
-              </a:defRPr>
-            </a:pPr>
-            <a:r>
-              <a:t>09</a:t>
-            </a:r>
-          </a:p>
-        </p:txBody>
-      </p:sp>
-      <p:sp>
-        <p:nvSpPr>
-          <p:cNvPr id="8" name="Rounded Rectangle 7"/>
-          <p:cNvSpPr/>
-          <p:nvPr/>
-        </p:nvSpPr>
-        <p:spPr>
-          <a:xfrm>
-            <a:off x="640080" y="2423160"/>
-            <a:ext cx="5715000" cy="3429000"/>
-          </a:xfrm>
-          <a:prstGeom prst="roundRect">
-            <a:avLst>
-              <a:gd name="adj" fmla="val 15000"/>
-            </a:avLst>
-          </a:prstGeom>
-          <a:solidFill>
-            <a:srgbClr val="151E33"/>
-          </a:solidFill>
-          <a:ln>
-            <a:solidFill>
-              <a:srgbClr val="2A3854"/>
-            </a:solidFill>
-          </a:ln>
-        </p:spPr>
-        <p:style>
-          <a:lnRef idx="1">
-            <a:schemeClr val="accent1"/>
-          </a:lnRef>
-          <a:fillRef idx="3">
-            <a:schemeClr val="accent1"/>
-          </a:fillRef>
-          <a:effectRef idx="2">
-            <a:schemeClr val="accent1"/>
-          </a:effectRef>
-          <a:fontRef idx="minor">
-            <a:schemeClr val="lt1"/>
-          </a:fontRef>
-        </p:style>
-        <p:txBody>
-          <a:bodyPr rtlCol="0" anchor="ctr"/>
-          <a:lstStyle/>
-          <a:p>
-            <a:pPr algn="ctr"/>
-          </a:p>
-        </p:txBody>
-      </p:sp>
-      <p:sp>
-        <p:nvSpPr>
-          <p:cNvPr id="9" name="Rounded Rectangle 8"/>
-          <p:cNvSpPr/>
-          <p:nvPr/>
-        </p:nvSpPr>
-        <p:spPr>
-          <a:xfrm>
-            <a:off x="822959" y="2587752"/>
-            <a:ext cx="77724" cy="77724"/>
-          </a:xfrm>
-          <a:prstGeom prst="roundRect">
-            <a:avLst>
-              <a:gd name="adj" fmla="val 15000"/>
-            </a:avLst>
-          </a:prstGeom>
-          <a:solidFill>
-            <a:srgbClr val="FFAA88"/>
-          </a:solidFill>
-          <a:ln>
-            <a:noFill/>
-          </a:ln>
-        </p:spPr>
-        <p:style>
-          <a:lnRef idx="1">
-            <a:schemeClr val="accent1"/>
-          </a:lnRef>
-          <a:fillRef idx="3">
-            <a:schemeClr val="accent1"/>
-          </a:fillRef>
-          <a:effectRef idx="2">
-            <a:schemeClr val="accent1"/>
-          </a:effectRef>
-          <a:fontRef idx="minor">
-            <a:schemeClr val="lt1"/>
-          </a:fontRef>
-        </p:style>
-        <p:txBody>
-          <a:bodyPr rtlCol="0" anchor="ctr"/>
-          <a:lstStyle/>
-          <a:p>
-            <a:pPr algn="ctr"/>
-          </a:p>
-        </p:txBody>
-      </p:sp>
-      <p:sp>
-        <p:nvSpPr>
-          <p:cNvPr id="10" name="Rounded Rectangle 9"/>
-          <p:cNvSpPr/>
-          <p:nvPr/>
-        </p:nvSpPr>
-        <p:spPr>
-          <a:xfrm>
-            <a:off x="987551" y="2587752"/>
-            <a:ext cx="77724" cy="77724"/>
-          </a:xfrm>
-          <a:prstGeom prst="roundRect">
-            <a:avLst>
-              <a:gd name="adj" fmla="val 15000"/>
-            </a:avLst>
-          </a:prstGeom>
-          <a:solidFill>
-            <a:srgbClr val="F4D381"/>
-          </a:solidFill>
-          <a:ln>
-            <a:noFill/>
-          </a:ln>
-        </p:spPr>
-        <p:style>
-          <a:lnRef idx="1">
-            <a:schemeClr val="accent1"/>
-          </a:lnRef>
-          <a:fillRef idx="3">
-            <a:schemeClr val="accent1"/>
-          </a:fillRef>
-          <a:effectRef idx="2">
-            <a:schemeClr val="accent1"/>
-          </a:effectRef>
-          <a:fontRef idx="minor">
-            <a:schemeClr val="lt1"/>
-          </a:fontRef>
-        </p:style>
-        <p:txBody>
-          <a:bodyPr rtlCol="0" anchor="ctr"/>
-          <a:lstStyle/>
-          <a:p>
-            <a:pPr algn="ctr"/>
-          </a:p>
-        </p:txBody>
-      </p:sp>
-      <p:sp>
-        <p:nvSpPr>
-          <p:cNvPr id="11" name="Rounded Rectangle 10"/>
-          <p:cNvSpPr/>
-          <p:nvPr/>
-        </p:nvSpPr>
-        <p:spPr>
-          <a:xfrm>
-            <a:off x="1152143" y="2587752"/>
-            <a:ext cx="77724" cy="77724"/>
-          </a:xfrm>
-          <a:prstGeom prst="roundRect">
-            <a:avLst>
-              <a:gd name="adj" fmla="val 15000"/>
-            </a:avLst>
-          </a:prstGeom>
-          <a:solidFill>
-            <a:srgbClr val="6CE5D2"/>
-          </a:solidFill>
-          <a:ln>
-            <a:noFill/>
-          </a:ln>
-        </p:spPr>
-        <p:style>
-          <a:lnRef idx="1">
-            <a:schemeClr val="accent1"/>
-          </a:lnRef>
-          <a:fillRef idx="3">
-            <a:schemeClr val="accent1"/>
-          </a:fillRef>
-          <a:effectRef idx="2">
-            <a:schemeClr val="accent1"/>
-          </a:effectRef>
-          <a:fontRef idx="minor">
-            <a:schemeClr val="lt1"/>
-          </a:fontRef>
-        </p:style>
-        <p:txBody>
-          <a:bodyPr rtlCol="0" anchor="ctr"/>
-          <a:lstStyle/>
-          <a:p>
-            <a:pPr algn="ctr"/>
-          </a:p>
-        </p:txBody>
-      </p:sp>
-      <p:sp>
-        <p:nvSpPr>
-          <p:cNvPr id="12" name="TextBox 11"/>
-          <p:cNvSpPr txBox="1"/>
-          <p:nvPr/>
-        </p:nvSpPr>
-        <p:spPr>
-          <a:xfrm>
-            <a:off x="1426464" y="2532888"/>
-            <a:ext cx="4800600" cy="256032"/>
-          </a:xfrm>
-          <a:prstGeom prst="rect">
-            <a:avLst/>
-          </a:prstGeom>
-          <a:noFill/>
-        </p:spPr>
-        <p:txBody>
-          <a:bodyPr wrap="square" lIns="9144" rIns="9144" tIns="0" bIns="0">
-            <a:spAutoFit/>
-          </a:bodyPr>
-          <a:lstStyle/>
-          <a:p>
-            <a:pPr>
-              <a:spcAft>
-                <a:spcPts val="700"/>
-              </a:spcAft>
-              <a:defRPr sz="1000" b="0">
-                <a:solidFill>
-                  <a:srgbClr val="B8C4DD"/>
-                </a:solidFill>
-                <a:latin typeface="DejaVu Sans Mono"/>
-              </a:defRPr>
-            </a:pPr>
-            <a:r>
-              <a:t>style.css</a:t>
-            </a:r>
-          </a:p>
-        </p:txBody>
-      </p:sp>
-      <p:sp>
-        <p:nvSpPr>
-          <p:cNvPr id="13" name="Rectangle 12"/>
-          <p:cNvSpPr/>
-          <p:nvPr/>
-        </p:nvSpPr>
-        <p:spPr>
-          <a:xfrm>
-            <a:off x="786384" y="2880360"/>
-            <a:ext cx="5422392" cy="10972"/>
-          </a:xfrm>
-          <a:prstGeom prst="rect">
-            <a:avLst/>
-          </a:prstGeom>
-          <a:solidFill>
-            <a:srgbClr val="2A3854"/>
-          </a:solidFill>
-          <a:ln>
-            <a:noFill/>
-          </a:ln>
-        </p:spPr>
-        <p:style>
-          <a:lnRef idx="1">
-            <a:schemeClr val="accent1"/>
-          </a:lnRef>
-          <a:fillRef idx="3">
-            <a:schemeClr val="accent1"/>
-          </a:fillRef>
-          <a:effectRef idx="2">
-            <a:schemeClr val="accent1"/>
-          </a:effectRef>
-          <a:fontRef idx="minor">
-            <a:schemeClr val="lt1"/>
-          </a:fontRef>
-        </p:style>
-        <p:txBody>
-          <a:bodyPr rtlCol="0" anchor="ctr"/>
-          <a:lstStyle/>
-          <a:p>
-            <a:pPr algn="ctr"/>
-          </a:p>
-        </p:txBody>
-      </p:sp>
-      <p:sp>
-        <p:nvSpPr>
-          <p:cNvPr id="14" name="TextBox 13"/>
-          <p:cNvSpPr txBox="1"/>
-          <p:nvPr/>
-        </p:nvSpPr>
-        <p:spPr>
-          <a:xfrm>
-            <a:off x="822959" y="3063239"/>
-            <a:ext cx="347472" cy="274320"/>
-          </a:xfrm>
-          <a:prstGeom prst="rect">
-            <a:avLst/>
-          </a:prstGeom>
-          <a:noFill/>
-        </p:spPr>
-        <p:txBody>
-          <a:bodyPr wrap="square" lIns="9144" rIns="9144" tIns="0" bIns="0">
-            <a:spAutoFit/>
-          </a:bodyPr>
-          <a:lstStyle/>
-          <a:p>
-            <a:pPr>
-              <a:spcAft>
-                <a:spcPts val="700"/>
-              </a:spcAft>
-              <a:defRPr sz="1400" b="0">
-                <a:solidFill>
-                  <a:srgbClr val="667795"/>
-                </a:solidFill>
-                <a:latin typeface="DejaVu Sans Mono"/>
-              </a:defRPr>
-            </a:pPr>
-            <a:r>
-              <a:t>01</a:t>
-            </a:r>
-          </a:p>
-        </p:txBody>
-      </p:sp>
-      <p:sp>
-        <p:nvSpPr>
-          <p:cNvPr id="15" name="TextBox 14"/>
-          <p:cNvSpPr txBox="1"/>
-          <p:nvPr/>
-        </p:nvSpPr>
-        <p:spPr>
-          <a:xfrm>
-            <a:off x="1271016" y="3063239"/>
-            <a:ext cx="4946904" cy="411480"/>
-          </a:xfrm>
-          <a:prstGeom prst="rect">
-            <a:avLst/>
-          </a:prstGeom>
-          <a:noFill/>
-        </p:spPr>
-        <p:txBody>
-          <a:bodyPr wrap="square" lIns="9144" rIns="9144" tIns="0" bIns="0">
-            <a:spAutoFit/>
-          </a:bodyPr>
-          <a:lstStyle/>
-          <a:p>
-            <a:pPr>
-              <a:spcAft>
-                <a:spcPts val="700"/>
-              </a:spcAft>
-              <a:defRPr sz="1800" b="0">
-                <a:solidFill>
-                  <a:srgbClr val="FFAA88"/>
-                </a:solidFill>
-                <a:latin typeface="DejaVu Sans Mono"/>
-              </a:defRPr>
-            </a:pPr>
-            <a:r>
-              <a:t>p { color: white; }</a:t>
-            </a:r>
-          </a:p>
-        </p:txBody>
-      </p:sp>
-      <p:sp>
-        <p:nvSpPr>
-          <p:cNvPr id="16" name="TextBox 15"/>
-          <p:cNvSpPr txBox="1"/>
-          <p:nvPr/>
-        </p:nvSpPr>
-        <p:spPr>
-          <a:xfrm>
-            <a:off x="822959" y="3387851"/>
-            <a:ext cx="347472" cy="274320"/>
-          </a:xfrm>
-          <a:prstGeom prst="rect">
-            <a:avLst/>
-          </a:prstGeom>
-          <a:noFill/>
-        </p:spPr>
-        <p:txBody>
-          <a:bodyPr wrap="square" lIns="9144" rIns="9144" tIns="0" bIns="0">
-            <a:spAutoFit/>
-          </a:bodyPr>
-          <a:lstStyle/>
-          <a:p>
-            <a:pPr>
-              <a:spcAft>
-                <a:spcPts val="700"/>
-              </a:spcAft>
-              <a:defRPr sz="1400" b="0">
-                <a:solidFill>
-                  <a:srgbClr val="667795"/>
-                </a:solidFill>
-                <a:latin typeface="DejaVu Sans Mono"/>
-              </a:defRPr>
-            </a:pPr>
-            <a:r>
-              <a:t>02</a:t>
-            </a:r>
-          </a:p>
-        </p:txBody>
-      </p:sp>
-      <p:sp>
-        <p:nvSpPr>
-          <p:cNvPr id="17" name="TextBox 16"/>
-          <p:cNvSpPr txBox="1"/>
-          <p:nvPr/>
-        </p:nvSpPr>
-        <p:spPr>
-          <a:xfrm>
-            <a:off x="1271016" y="3387851"/>
-            <a:ext cx="4946904" cy="411480"/>
-          </a:xfrm>
-          <a:prstGeom prst="rect">
-            <a:avLst/>
-          </a:prstGeom>
-          <a:noFill/>
-        </p:spPr>
-        <p:txBody>
-          <a:bodyPr wrap="square" lIns="9144" rIns="9144" tIns="0" bIns="0">
-            <a:spAutoFit/>
-          </a:bodyPr>
-          <a:lstStyle/>
-          <a:p>
-            <a:pPr>
-              <a:spcAft>
-                <a:spcPts val="700"/>
-              </a:spcAft>
-              <a:defRPr sz="1800" b="0">
-                <a:solidFill>
-                  <a:srgbClr val="F4F7FF"/>
-                </a:solidFill>
-                <a:latin typeface="DejaVu Sans Mono"/>
-              </a:defRPr>
-            </a:pPr>
-          </a:p>
-        </p:txBody>
-      </p:sp>
-      <p:sp>
-        <p:nvSpPr>
-          <p:cNvPr id="18" name="TextBox 17"/>
-          <p:cNvSpPr txBox="1"/>
-          <p:nvPr/>
-        </p:nvSpPr>
-        <p:spPr>
-          <a:xfrm>
-            <a:off x="822959" y="3712463"/>
-            <a:ext cx="347472" cy="274320"/>
-          </a:xfrm>
-          <a:prstGeom prst="rect">
-            <a:avLst/>
-          </a:prstGeom>
-          <a:noFill/>
-        </p:spPr>
-        <p:txBody>
-          <a:bodyPr wrap="square" lIns="9144" rIns="9144" tIns="0" bIns="0">
-            <a:spAutoFit/>
-          </a:bodyPr>
-          <a:lstStyle/>
-          <a:p>
-            <a:pPr>
-              <a:spcAft>
-                <a:spcPts val="700"/>
-              </a:spcAft>
-              <a:defRPr sz="1400" b="0">
-                <a:solidFill>
-                  <a:srgbClr val="667795"/>
-                </a:solidFill>
-                <a:latin typeface="DejaVu Sans Mono"/>
-              </a:defRPr>
-            </a:pPr>
-            <a:r>
-              <a:t>03</a:t>
-            </a:r>
-          </a:p>
-        </p:txBody>
-      </p:sp>
-      <p:sp>
-        <p:nvSpPr>
-          <p:cNvPr id="19" name="TextBox 18"/>
-          <p:cNvSpPr txBox="1"/>
-          <p:nvPr/>
-        </p:nvSpPr>
-        <p:spPr>
-          <a:xfrm>
-            <a:off x="1271016" y="3712463"/>
-            <a:ext cx="4946904" cy="411480"/>
-          </a:xfrm>
-          <a:prstGeom prst="rect">
-            <a:avLst/>
-          </a:prstGeom>
-          <a:noFill/>
-        </p:spPr>
-        <p:txBody>
-          <a:bodyPr wrap="square" lIns="9144" rIns="9144" tIns="0" bIns="0">
-            <a:spAutoFit/>
-          </a:bodyPr>
-          <a:lstStyle/>
-          <a:p>
-            <a:pPr>
-              <a:spcAft>
-                <a:spcPts val="700"/>
-              </a:spcAft>
-              <a:defRPr sz="1800" b="0">
-                <a:solidFill>
-                  <a:srgbClr val="FFAA88"/>
-                </a:solidFill>
-                <a:latin typeface="DejaVu Sans Mono"/>
-              </a:defRPr>
-            </a:pPr>
-            <a:r>
-              <a:t>.aviso { color: #6ce5d2; }</a:t>
-            </a:r>
-          </a:p>
-        </p:txBody>
-      </p:sp>
-      <p:sp>
-        <p:nvSpPr>
-          <p:cNvPr id="20" name="TextBox 19"/>
-          <p:cNvSpPr txBox="1"/>
-          <p:nvPr/>
-        </p:nvSpPr>
-        <p:spPr>
-          <a:xfrm>
-            <a:off x="822959" y="4037075"/>
-            <a:ext cx="347472" cy="274320"/>
-          </a:xfrm>
-          <a:prstGeom prst="rect">
-            <a:avLst/>
-          </a:prstGeom>
-          <a:noFill/>
-        </p:spPr>
-        <p:txBody>
-          <a:bodyPr wrap="square" lIns="9144" rIns="9144" tIns="0" bIns="0">
-            <a:spAutoFit/>
-          </a:bodyPr>
-          <a:lstStyle/>
-          <a:p>
-            <a:pPr>
-              <a:spcAft>
-                <a:spcPts val="700"/>
-              </a:spcAft>
-              <a:defRPr sz="1400" b="0">
-                <a:solidFill>
-                  <a:srgbClr val="667795"/>
-                </a:solidFill>
-                <a:latin typeface="DejaVu Sans Mono"/>
-              </a:defRPr>
-            </a:pPr>
-            <a:r>
-              <a:t>04</a:t>
-            </a:r>
-          </a:p>
-        </p:txBody>
-      </p:sp>
-      <p:sp>
-        <p:nvSpPr>
-          <p:cNvPr id="21" name="TextBox 20"/>
-          <p:cNvSpPr txBox="1"/>
-          <p:nvPr/>
-        </p:nvSpPr>
-        <p:spPr>
-          <a:xfrm>
-            <a:off x="1271016" y="4037075"/>
-            <a:ext cx="4946904" cy="411480"/>
-          </a:xfrm>
-          <a:prstGeom prst="rect">
-            <a:avLst/>
-          </a:prstGeom>
-          <a:noFill/>
-        </p:spPr>
-        <p:txBody>
-          <a:bodyPr wrap="square" lIns="9144" rIns="9144" tIns="0" bIns="0">
-            <a:spAutoFit/>
-          </a:bodyPr>
-          <a:lstStyle/>
-          <a:p>
-            <a:pPr>
-              <a:spcAft>
-                <a:spcPts val="700"/>
-              </a:spcAft>
-              <a:defRPr sz="1800" b="0">
-                <a:solidFill>
-                  <a:srgbClr val="F4F7FF"/>
-                </a:solidFill>
-                <a:latin typeface="DejaVu Sans Mono"/>
-              </a:defRPr>
-            </a:pPr>
-          </a:p>
-        </p:txBody>
-      </p:sp>
-      <p:sp>
-        <p:nvSpPr>
-          <p:cNvPr id="22" name="TextBox 21"/>
-          <p:cNvSpPr txBox="1"/>
-          <p:nvPr/>
-        </p:nvSpPr>
-        <p:spPr>
-          <a:xfrm>
-            <a:off x="822959" y="4361688"/>
-            <a:ext cx="347472" cy="274320"/>
-          </a:xfrm>
-          <a:prstGeom prst="rect">
-            <a:avLst/>
-          </a:prstGeom>
-          <a:noFill/>
-        </p:spPr>
-        <p:txBody>
-          <a:bodyPr wrap="square" lIns="9144" rIns="9144" tIns="0" bIns="0">
-            <a:spAutoFit/>
-          </a:bodyPr>
-          <a:lstStyle/>
-          <a:p>
-            <a:pPr>
-              <a:spcAft>
-                <a:spcPts val="700"/>
-              </a:spcAft>
-              <a:defRPr sz="1400" b="0">
-                <a:solidFill>
-                  <a:srgbClr val="667795"/>
-                </a:solidFill>
-                <a:latin typeface="DejaVu Sans Mono"/>
-              </a:defRPr>
-            </a:pPr>
-            <a:r>
-              <a:t>05</a:t>
-            </a:r>
-          </a:p>
-        </p:txBody>
-      </p:sp>
-      <p:sp>
-        <p:nvSpPr>
-          <p:cNvPr id="23" name="TextBox 22"/>
-          <p:cNvSpPr txBox="1"/>
-          <p:nvPr/>
-        </p:nvSpPr>
-        <p:spPr>
-          <a:xfrm>
-            <a:off x="1271016" y="4361688"/>
-            <a:ext cx="4946904" cy="411480"/>
-          </a:xfrm>
-          <a:prstGeom prst="rect">
-            <a:avLst/>
-          </a:prstGeom>
-          <a:noFill/>
-        </p:spPr>
-        <p:txBody>
-          <a:bodyPr wrap="square" lIns="9144" rIns="9144" tIns="0" bIns="0">
-            <a:spAutoFit/>
-          </a:bodyPr>
-          <a:lstStyle/>
-          <a:p>
-            <a:pPr>
-              <a:spcAft>
-                <a:spcPts val="700"/>
-              </a:spcAft>
-              <a:defRPr sz="1800" b="0">
-                <a:solidFill>
-                  <a:srgbClr val="FFAA88"/>
-                </a:solidFill>
-                <a:latin typeface="DejaVu Sans Mono"/>
-              </a:defRPr>
-            </a:pPr>
-            <a:r>
-              <a:t>#mensagem { color: #ffaa88; }</a:t>
-            </a:r>
-          </a:p>
-        </p:txBody>
-      </p:sp>
-      <p:sp>
-        <p:nvSpPr>
-          <p:cNvPr id="24" name="Rounded Rectangle 23"/>
-          <p:cNvSpPr/>
-          <p:nvPr/>
-        </p:nvSpPr>
-        <p:spPr>
-          <a:xfrm>
-            <a:off x="6766560" y="2423160"/>
-            <a:ext cx="4754880" cy="1417320"/>
-          </a:xfrm>
-          <a:prstGeom prst="roundRect">
-            <a:avLst>
-              <a:gd name="adj" fmla="val 15000"/>
-            </a:avLst>
-          </a:prstGeom>
-          <a:solidFill>
-            <a:srgbClr val="151E33"/>
-          </a:solidFill>
-          <a:ln>
-            <a:solidFill>
-              <a:srgbClr val="2A3854"/>
-            </a:solidFill>
-          </a:ln>
-        </p:spPr>
-        <p:style>
-          <a:lnRef idx="1">
-            <a:schemeClr val="accent1"/>
-          </a:lnRef>
-          <a:fillRef idx="3">
-            <a:schemeClr val="accent1"/>
-          </a:fillRef>
-          <a:effectRef idx="2">
-            <a:schemeClr val="accent1"/>
-          </a:effectRef>
-          <a:fontRef idx="minor">
-            <a:schemeClr val="lt1"/>
-          </a:fontRef>
-        </p:style>
-        <p:txBody>
-          <a:bodyPr rtlCol="0" anchor="ctr"/>
-          <a:lstStyle/>
-          <a:p>
-            <a:pPr algn="ctr"/>
-          </a:p>
-        </p:txBody>
-      </p:sp>
-      <p:sp>
-        <p:nvSpPr>
-          <p:cNvPr id="25" name="Rounded Rectangle 24"/>
-          <p:cNvSpPr/>
-          <p:nvPr/>
-        </p:nvSpPr>
-        <p:spPr>
-          <a:xfrm>
-            <a:off x="6949440" y="2587752"/>
-            <a:ext cx="77724" cy="77724"/>
-          </a:xfrm>
-          <a:prstGeom prst="roundRect">
-            <a:avLst>
-              <a:gd name="adj" fmla="val 15000"/>
-            </a:avLst>
-          </a:prstGeom>
-          <a:solidFill>
-            <a:srgbClr val="FFAA88"/>
-          </a:solidFill>
-          <a:ln>
-            <a:noFill/>
-          </a:ln>
-        </p:spPr>
-        <p:style>
-          <a:lnRef idx="1">
-            <a:schemeClr val="accent1"/>
-          </a:lnRef>
-          <a:fillRef idx="3">
-            <a:schemeClr val="accent1"/>
-          </a:fillRef>
-          <a:effectRef idx="2">
-            <a:schemeClr val="accent1"/>
-          </a:effectRef>
-          <a:fontRef idx="minor">
-            <a:schemeClr val="lt1"/>
-          </a:fontRef>
-        </p:style>
-        <p:txBody>
-          <a:bodyPr rtlCol="0" anchor="ctr"/>
-          <a:lstStyle/>
-          <a:p>
-            <a:pPr algn="ctr"/>
-          </a:p>
-        </p:txBody>
-      </p:sp>
-      <p:sp>
-        <p:nvSpPr>
-          <p:cNvPr id="26" name="Rounded Rectangle 25"/>
-          <p:cNvSpPr/>
-          <p:nvPr/>
-        </p:nvSpPr>
-        <p:spPr>
-          <a:xfrm>
-            <a:off x="7114032" y="2587752"/>
-            <a:ext cx="77724" cy="77724"/>
-          </a:xfrm>
-          <a:prstGeom prst="roundRect">
-            <a:avLst>
-              <a:gd name="adj" fmla="val 15000"/>
-            </a:avLst>
-          </a:prstGeom>
-          <a:solidFill>
-            <a:srgbClr val="F4D381"/>
-          </a:solidFill>
-          <a:ln>
-            <a:noFill/>
-          </a:ln>
-        </p:spPr>
-        <p:style>
-          <a:lnRef idx="1">
-            <a:schemeClr val="accent1"/>
-          </a:lnRef>
-          <a:fillRef idx="3">
-            <a:schemeClr val="accent1"/>
-          </a:fillRef>
-          <a:effectRef idx="2">
-            <a:schemeClr val="accent1"/>
-          </a:effectRef>
-          <a:fontRef idx="minor">
-            <a:schemeClr val="lt1"/>
-          </a:fontRef>
-        </p:style>
-        <p:txBody>
-          <a:bodyPr rtlCol="0" anchor="ctr"/>
-          <a:lstStyle/>
-          <a:p>
-            <a:pPr algn="ctr"/>
-          </a:p>
-        </p:txBody>
-      </p:sp>
-      <p:sp>
-        <p:nvSpPr>
-          <p:cNvPr id="27" name="Rounded Rectangle 26"/>
-          <p:cNvSpPr/>
-          <p:nvPr/>
-        </p:nvSpPr>
-        <p:spPr>
-          <a:xfrm>
-            <a:off x="7278624" y="2587752"/>
-            <a:ext cx="77724" cy="77724"/>
-          </a:xfrm>
-          <a:prstGeom prst="roundRect">
-            <a:avLst>
-              <a:gd name="adj" fmla="val 15000"/>
-            </a:avLst>
-          </a:prstGeom>
-          <a:solidFill>
-            <a:srgbClr val="6CE5D2"/>
-          </a:solidFill>
-          <a:ln>
-            <a:noFill/>
-          </a:ln>
-        </p:spPr>
-        <p:style>
-          <a:lnRef idx="1">
-            <a:schemeClr val="accent1"/>
-          </a:lnRef>
-          <a:fillRef idx="3">
-            <a:schemeClr val="accent1"/>
-          </a:fillRef>
-          <a:effectRef idx="2">
-            <a:schemeClr val="accent1"/>
-          </a:effectRef>
-          <a:fontRef idx="minor">
-            <a:schemeClr val="lt1"/>
-          </a:fontRef>
-        </p:style>
-        <p:txBody>
-          <a:bodyPr rtlCol="0" anchor="ctr"/>
-          <a:lstStyle/>
-          <a:p>
-            <a:pPr algn="ctr"/>
-          </a:p>
-        </p:txBody>
-      </p:sp>
-      <p:sp>
-        <p:nvSpPr>
-          <p:cNvPr id="28" name="TextBox 27"/>
-          <p:cNvSpPr txBox="1"/>
-          <p:nvPr/>
-        </p:nvSpPr>
-        <p:spPr>
-          <a:xfrm>
-            <a:off x="7552944" y="2532888"/>
-            <a:ext cx="3840480" cy="256032"/>
-          </a:xfrm>
-          <a:prstGeom prst="rect">
-            <a:avLst/>
-          </a:prstGeom>
-          <a:noFill/>
-        </p:spPr>
-        <p:txBody>
-          <a:bodyPr wrap="square" lIns="9144" rIns="9144" tIns="0" bIns="0">
-            <a:spAutoFit/>
-          </a:bodyPr>
-          <a:lstStyle/>
-          <a:p>
-            <a:pPr>
-              <a:spcAft>
-                <a:spcPts val="700"/>
-              </a:spcAft>
-              <a:defRPr sz="1000" b="0">
-                <a:solidFill>
-                  <a:srgbClr val="B8C4DD"/>
-                </a:solidFill>
-                <a:latin typeface="DejaVu Sans Mono"/>
-              </a:defRPr>
-            </a:pPr>
-            <a:r>
-              <a:t>index.html</a:t>
-            </a:r>
-          </a:p>
-        </p:txBody>
-      </p:sp>
-      <p:sp>
-        <p:nvSpPr>
-          <p:cNvPr id="29" name="Rectangle 28"/>
-          <p:cNvSpPr/>
-          <p:nvPr/>
-        </p:nvSpPr>
-        <p:spPr>
-          <a:xfrm>
-            <a:off x="6912864" y="2880360"/>
-            <a:ext cx="4462272" cy="10972"/>
-          </a:xfrm>
-          <a:prstGeom prst="rect">
-            <a:avLst/>
-          </a:prstGeom>
-          <a:solidFill>
-            <a:srgbClr val="2A3854"/>
-          </a:solidFill>
-          <a:ln>
-            <a:noFill/>
-          </a:ln>
-        </p:spPr>
-        <p:style>
-          <a:lnRef idx="1">
-            <a:schemeClr val="accent1"/>
-          </a:lnRef>
-          <a:fillRef idx="3">
-            <a:schemeClr val="accent1"/>
-          </a:fillRef>
-          <a:effectRef idx="2">
-            <a:schemeClr val="accent1"/>
-          </a:effectRef>
-          <a:fontRef idx="minor">
-            <a:schemeClr val="lt1"/>
-          </a:fontRef>
-        </p:style>
-        <p:txBody>
-          <a:bodyPr rtlCol="0" anchor="ctr"/>
-          <a:lstStyle/>
-          <a:p>
-            <a:pPr algn="ctr"/>
-          </a:p>
-        </p:txBody>
-      </p:sp>
-      <p:sp>
-        <p:nvSpPr>
-          <p:cNvPr id="30" name="TextBox 29"/>
-          <p:cNvSpPr txBox="1"/>
-          <p:nvPr/>
-        </p:nvSpPr>
-        <p:spPr>
-          <a:xfrm>
-            <a:off x="6949440" y="3063239"/>
-            <a:ext cx="347472" cy="274320"/>
-          </a:xfrm>
-          <a:prstGeom prst="rect">
-            <a:avLst/>
-          </a:prstGeom>
-          <a:noFill/>
-        </p:spPr>
-        <p:txBody>
-          <a:bodyPr wrap="square" lIns="9144" rIns="9144" tIns="0" bIns="0">
-            <a:spAutoFit/>
-          </a:bodyPr>
-          <a:lstStyle/>
-          <a:p>
-            <a:pPr>
-              <a:spcAft>
-                <a:spcPts val="700"/>
-              </a:spcAft>
-              <a:defRPr sz="800" b="0">
-                <a:solidFill>
-                  <a:srgbClr val="667795"/>
-                </a:solidFill>
-                <a:latin typeface="DejaVu Sans Mono"/>
-              </a:defRPr>
-            </a:pPr>
-            <a:r>
-              <a:t>01</a:t>
-            </a:r>
-          </a:p>
-        </p:txBody>
-      </p:sp>
-      <p:sp>
-        <p:nvSpPr>
-          <p:cNvPr id="31" name="TextBox 30"/>
-          <p:cNvSpPr txBox="1"/>
-          <p:nvPr/>
-        </p:nvSpPr>
-        <p:spPr>
-          <a:xfrm>
-            <a:off x="7397496" y="3063239"/>
-            <a:ext cx="3986784" cy="411480"/>
-          </a:xfrm>
-          <a:prstGeom prst="rect">
-            <a:avLst/>
-          </a:prstGeom>
-          <a:noFill/>
-        </p:spPr>
-        <p:txBody>
-          <a:bodyPr wrap="square" lIns="9144" rIns="9144" tIns="0" bIns="0">
-            <a:spAutoFit/>
-          </a:bodyPr>
-          <a:lstStyle/>
-          <a:p>
-            <a:pPr>
-              <a:spcAft>
-                <a:spcPts val="700"/>
-              </a:spcAft>
-              <a:defRPr sz="1200" b="0">
-                <a:solidFill>
-                  <a:srgbClr val="6CE5D2"/>
-                </a:solidFill>
-                <a:latin typeface="DejaVu Sans Mono"/>
-              </a:defRPr>
-            </a:pPr>
-            <a:r>
-              <a:t>&lt;p id="mensagem" class="aviso"&gt;Olá!&lt;/p&gt;</a:t>
-            </a:r>
-          </a:p>
-        </p:txBody>
-      </p:sp>
-      <p:sp>
-        <p:nvSpPr>
-          <p:cNvPr id="32" name="TextBox 31"/>
-          <p:cNvSpPr txBox="1"/>
-          <p:nvPr/>
-        </p:nvSpPr>
-        <p:spPr>
-          <a:xfrm>
-            <a:off x="7040880" y="4233672"/>
-            <a:ext cx="4023360" cy="594360"/>
-          </a:xfrm>
-          <a:prstGeom prst="rect">
-            <a:avLst/>
-          </a:prstGeom>
-          <a:noFill/>
-        </p:spPr>
-        <p:txBody>
-          <a:bodyPr wrap="square" lIns="9144" rIns="9144" tIns="0" bIns="0">
-            <a:spAutoFit/>
-          </a:bodyPr>
-          <a:lstStyle/>
-          <a:p>
-            <a:pPr>
-              <a:spcAft>
-                <a:spcPts val="700"/>
-              </a:spcAft>
-              <a:defRPr sz="3800" b="1">
-                <a:solidFill>
-                  <a:srgbClr val="FFAA88"/>
-                </a:solidFill>
-                <a:latin typeface="DejaVu Sans"/>
-              </a:defRPr>
-            </a:pPr>
-            <a:r>
-              <a:t>Olá!</a:t>
-            </a:r>
-          </a:p>
-        </p:txBody>
-      </p:sp>
-      <p:sp>
-        <p:nvSpPr>
-          <p:cNvPr id="33" name="TextBox 32"/>
-          <p:cNvSpPr txBox="1"/>
-          <p:nvPr/>
-        </p:nvSpPr>
-        <p:spPr>
-          <a:xfrm>
-            <a:off x="7040880" y="5074920"/>
-            <a:ext cx="4023360" cy="731520"/>
-          </a:xfrm>
-          <a:prstGeom prst="rect">
-            <a:avLst/>
-          </a:prstGeom>
-          <a:noFill/>
-        </p:spPr>
-        <p:txBody>
-          <a:bodyPr wrap="square" lIns="9144" rIns="9144" tIns="0" bIns="0">
-            <a:spAutoFit/>
-          </a:bodyPr>
-          <a:lstStyle/>
-          <a:p>
-            <a:pPr>
-              <a:spcAft>
-                <a:spcPts val="700"/>
-              </a:spcAft>
-              <a:defRPr sz="1700" b="0">
-                <a:solidFill>
-                  <a:srgbClr val="B8C4DD"/>
-                </a:solidFill>
-                <a:latin typeface="DejaVu Sans"/>
-              </a:defRPr>
-            </a:pPr>
-            <a:r>
-              <a:t>Neste exemplo, o seletor de ID</a:t>
-            </a:r>
-          </a:p>
-          <a:p>
-            <a:pPr>
-              <a:spcAft>
-                <a:spcPts val="700"/>
-              </a:spcAft>
-              <a:defRPr sz="1700" b="0">
-                <a:solidFill>
-                  <a:srgbClr val="B8C4DD"/>
-                </a:solidFill>
-                <a:latin typeface="DejaVu Sans"/>
-              </a:defRPr>
-            </a:pPr>
-            <a:r>
-              <a:t>tem maior especificidade.</a:t>
-            </a:r>
-          </a:p>
-        </p:txBody>
-      </p:sp>
-      <p:sp>
-        <p:nvSpPr>
-          <p:cNvPr id="34" name="TextBox 33"/>
-          <p:cNvSpPr txBox="1"/>
-          <p:nvPr/>
-        </p:nvSpPr>
-        <p:spPr>
-          <a:xfrm>
-            <a:off x="685800" y="6007608"/>
-            <a:ext cx="10698480" cy="274320"/>
-          </a:xfrm>
-          <a:prstGeom prst="rect">
-            <a:avLst/>
-          </a:prstGeom>
-          <a:noFill/>
-        </p:spPr>
-        <p:txBody>
-          <a:bodyPr wrap="square" lIns="9144" rIns="9144" tIns="0" bIns="0">
-            <a:spAutoFit/>
-          </a:bodyPr>
-          <a:lstStyle/>
-          <a:p>
-            <a:pPr>
-              <a:spcAft>
-                <a:spcPts val="700"/>
-              </a:spcAft>
-              <a:defRPr sz="1400" b="0">
-                <a:solidFill>
-                  <a:srgbClr val="6CE5D2"/>
-                </a:solidFill>
-                <a:latin typeface="DejaVu Sans"/>
-              </a:defRPr>
-            </a:pPr>
-            <a:r>
-              <a:t>No mesmo contexto de cascata: ID &gt; classe &gt; tipo. Em empate, vence a última regra.</a:t>
             </a:r>
           </a:p>
         </p:txBody>
